--- a/06week/ResNet-AutoEncoder.pptx
+++ b/06week/ResNet-AutoEncoder.pptx
@@ -5,7 +5,7 @@
     <p:sldMasterId id="2147483696" r:id="rId1"/>
   </p:sldMasterIdLst>
   <p:notesMasterIdLst>
-    <p:notesMasterId r:id="rId19"/>
+    <p:notesMasterId r:id="rId21"/>
   </p:notesMasterIdLst>
   <p:sldIdLst>
     <p:sldId id="256" r:id="rId2"/>
@@ -17,14 +17,16 @@
     <p:sldId id="288" r:id="rId8"/>
     <p:sldId id="289" r:id="rId9"/>
     <p:sldId id="283" r:id="rId10"/>
-    <p:sldId id="279" r:id="rId11"/>
-    <p:sldId id="278" r:id="rId12"/>
-    <p:sldId id="275" r:id="rId13"/>
-    <p:sldId id="276" r:id="rId14"/>
-    <p:sldId id="277" r:id="rId15"/>
-    <p:sldId id="280" r:id="rId16"/>
-    <p:sldId id="281" r:id="rId17"/>
-    <p:sldId id="282" r:id="rId18"/>
+    <p:sldId id="291" r:id="rId11"/>
+    <p:sldId id="290" r:id="rId12"/>
+    <p:sldId id="292" r:id="rId13"/>
+    <p:sldId id="279" r:id="rId14"/>
+    <p:sldId id="275" r:id="rId15"/>
+    <p:sldId id="276" r:id="rId16"/>
+    <p:sldId id="277" r:id="rId17"/>
+    <p:sldId id="280" r:id="rId18"/>
+    <p:sldId id="281" r:id="rId19"/>
+    <p:sldId id="282" r:id="rId20"/>
   </p:sldIdLst>
   <p:sldSz cx="12192000" cy="6858000"/>
   <p:notesSz cx="6858000" cy="9144000"/>
@@ -633,7 +635,7 @@
           <a:p>
             <a:fld id="{F5FC8C12-2702-4545-91FC-B559E7ED4DC3}" type="datetimeFigureOut">
               <a:rPr lang="ko-KR" altLang="en-US" smtClean="0"/>
-              <a:t>2026-03-20</a:t>
+              <a:t>2026-03-23</a:t>
             </a:fld>
             <a:endParaRPr lang="ko-KR" altLang="en-US"/>
           </a:p>
@@ -1239,7 +1241,7 @@
           <a:p>
             <a:fld id="{35E90772-3C17-48BD-9462-1080E2FAA39E}" type="datetimeFigureOut">
               <a:rPr lang="ko-KR" altLang="en-US" smtClean="0"/>
-              <a:t>2026-03-20</a:t>
+              <a:t>2026-03-23</a:t>
             </a:fld>
             <a:endParaRPr lang="ko-KR" altLang="en-US"/>
           </a:p>
@@ -1437,7 +1439,7 @@
           <a:p>
             <a:fld id="{35E90772-3C17-48BD-9462-1080E2FAA39E}" type="datetimeFigureOut">
               <a:rPr lang="ko-KR" altLang="en-US" smtClean="0"/>
-              <a:t>2026-03-20</a:t>
+              <a:t>2026-03-23</a:t>
             </a:fld>
             <a:endParaRPr lang="ko-KR" altLang="en-US"/>
           </a:p>
@@ -1645,7 +1647,7 @@
           <a:p>
             <a:fld id="{35E90772-3C17-48BD-9462-1080E2FAA39E}" type="datetimeFigureOut">
               <a:rPr lang="ko-KR" altLang="en-US" smtClean="0"/>
-              <a:t>2026-03-20</a:t>
+              <a:t>2026-03-23</a:t>
             </a:fld>
             <a:endParaRPr lang="ko-KR" altLang="en-US"/>
           </a:p>
@@ -1843,7 +1845,7 @@
           <a:p>
             <a:fld id="{35E90772-3C17-48BD-9462-1080E2FAA39E}" type="datetimeFigureOut">
               <a:rPr lang="ko-KR" altLang="en-US" smtClean="0"/>
-              <a:t>2026-03-20</a:t>
+              <a:t>2026-03-23</a:t>
             </a:fld>
             <a:endParaRPr lang="ko-KR" altLang="en-US"/>
           </a:p>
@@ -2118,7 +2120,7 @@
           <a:p>
             <a:fld id="{35E90772-3C17-48BD-9462-1080E2FAA39E}" type="datetimeFigureOut">
               <a:rPr lang="ko-KR" altLang="en-US" smtClean="0"/>
-              <a:t>2026-03-20</a:t>
+              <a:t>2026-03-23</a:t>
             </a:fld>
             <a:endParaRPr lang="ko-KR" altLang="en-US"/>
           </a:p>
@@ -2383,7 +2385,7 @@
           <a:p>
             <a:fld id="{35E90772-3C17-48BD-9462-1080E2FAA39E}" type="datetimeFigureOut">
               <a:rPr lang="ko-KR" altLang="en-US" smtClean="0"/>
-              <a:t>2026-03-20</a:t>
+              <a:t>2026-03-23</a:t>
             </a:fld>
             <a:endParaRPr lang="ko-KR" altLang="en-US"/>
           </a:p>
@@ -2795,7 +2797,7 @@
           <a:p>
             <a:fld id="{35E90772-3C17-48BD-9462-1080E2FAA39E}" type="datetimeFigureOut">
               <a:rPr lang="ko-KR" altLang="en-US" smtClean="0"/>
-              <a:t>2026-03-20</a:t>
+              <a:t>2026-03-23</a:t>
             </a:fld>
             <a:endParaRPr lang="ko-KR" altLang="en-US"/>
           </a:p>
@@ -2936,7 +2938,7 @@
           <a:p>
             <a:fld id="{35E90772-3C17-48BD-9462-1080E2FAA39E}" type="datetimeFigureOut">
               <a:rPr lang="ko-KR" altLang="en-US" smtClean="0"/>
-              <a:t>2026-03-20</a:t>
+              <a:t>2026-03-23</a:t>
             </a:fld>
             <a:endParaRPr lang="ko-KR" altLang="en-US"/>
           </a:p>
@@ -3049,7 +3051,7 @@
           <a:p>
             <a:fld id="{35E90772-3C17-48BD-9462-1080E2FAA39E}" type="datetimeFigureOut">
               <a:rPr lang="ko-KR" altLang="en-US" smtClean="0"/>
-              <a:t>2026-03-20</a:t>
+              <a:t>2026-03-23</a:t>
             </a:fld>
             <a:endParaRPr lang="ko-KR" altLang="en-US"/>
           </a:p>
@@ -3360,7 +3362,7 @@
           <a:p>
             <a:fld id="{35E90772-3C17-48BD-9462-1080E2FAA39E}" type="datetimeFigureOut">
               <a:rPr lang="ko-KR" altLang="en-US" smtClean="0"/>
-              <a:t>2026-03-20</a:t>
+              <a:t>2026-03-23</a:t>
             </a:fld>
             <a:endParaRPr lang="ko-KR" altLang="en-US"/>
           </a:p>
@@ -3648,7 +3650,7 @@
           <a:p>
             <a:fld id="{35E90772-3C17-48BD-9462-1080E2FAA39E}" type="datetimeFigureOut">
               <a:rPr lang="ko-KR" altLang="en-US" smtClean="0"/>
-              <a:t>2026-03-20</a:t>
+              <a:t>2026-03-23</a:t>
             </a:fld>
             <a:endParaRPr lang="ko-KR" altLang="en-US"/>
           </a:p>
@@ -3889,7 +3891,7 @@
           <a:p>
             <a:fld id="{35E90772-3C17-48BD-9462-1080E2FAA39E}" type="datetimeFigureOut">
               <a:rPr lang="ko-KR" altLang="en-US" smtClean="0"/>
-              <a:t>2026-03-20</a:t>
+              <a:t>2026-03-23</a:t>
             </a:fld>
             <a:endParaRPr lang="ko-KR" altLang="en-US"/>
           </a:p>
@@ -4397,7 +4399,7 @@
         <p:cNvPr id="1" name="">
           <a:extLst>
             <a:ext uri="{FF2B5EF4-FFF2-40B4-BE49-F238E27FC236}">
-              <a16:creationId xmlns:a16="http://schemas.microsoft.com/office/drawing/2014/main" id="{257AC50A-CEF8-ACE1-5866-0C0F3905AA3B}"/>
+              <a16:creationId xmlns:a16="http://schemas.microsoft.com/office/drawing/2014/main" id="{DED7C59E-B0A0-AEDA-9065-1484767CE5C4}"/>
             </a:ext>
           </a:extLst>
         </p:cNvPr>
@@ -4417,7 +4419,7 @@
           <p:cNvPr id="6" name="TextBox 5">
             <a:extLst>
               <a:ext uri="{FF2B5EF4-FFF2-40B4-BE49-F238E27FC236}">
-                <a16:creationId xmlns:a16="http://schemas.microsoft.com/office/drawing/2014/main" id="{B09E3D56-3BE6-10E0-99D5-DCE6B26BD403}"/>
+                <a16:creationId xmlns:a16="http://schemas.microsoft.com/office/drawing/2014/main" id="{B5CD20EB-AB05-5912-2DDE-7ACBB165411A}"/>
               </a:ext>
             </a:extLst>
           </p:cNvPr>
@@ -4461,7 +4463,7 @@
           <p:cNvPr id="7" name="TextBox 6">
             <a:extLst>
               <a:ext uri="{FF2B5EF4-FFF2-40B4-BE49-F238E27FC236}">
-                <a16:creationId xmlns:a16="http://schemas.microsoft.com/office/drawing/2014/main" id="{5D60B7E0-5031-3F06-75FC-BF25229821B3}"/>
+                <a16:creationId xmlns:a16="http://schemas.microsoft.com/office/drawing/2014/main" id="{E08D696B-F616-54C3-470D-775C18067F2A}"/>
               </a:ext>
             </a:extLst>
           </p:cNvPr>
@@ -4521,7 +4523,7 @@
           <p:cNvPr id="9" name="직선 연결선 8">
             <a:extLst>
               <a:ext uri="{FF2B5EF4-FFF2-40B4-BE49-F238E27FC236}">
-                <a16:creationId xmlns:a16="http://schemas.microsoft.com/office/drawing/2014/main" id="{38E762AF-C0F1-6B85-9E78-A1F1C31D41AB}"/>
+                <a16:creationId xmlns:a16="http://schemas.microsoft.com/office/drawing/2014/main" id="{4C4C1CFD-28D2-2282-9476-B39EE357339A}"/>
               </a:ext>
             </a:extLst>
           </p:cNvPr>
@@ -4558,7 +4560,7 @@
           <p:cNvPr id="11" name="직선 연결선 10">
             <a:extLst>
               <a:ext uri="{FF2B5EF4-FFF2-40B4-BE49-F238E27FC236}">
-                <a16:creationId xmlns:a16="http://schemas.microsoft.com/office/drawing/2014/main" id="{FFABD335-1168-C4B0-E267-A43C9B96103D}"/>
+                <a16:creationId xmlns:a16="http://schemas.microsoft.com/office/drawing/2014/main" id="{AC1E1087-6ACE-CA2C-7680-03408458341E}"/>
               </a:ext>
             </a:extLst>
           </p:cNvPr>
@@ -4595,7 +4597,7 @@
           <p:cNvPr id="4" name="TextBox 3">
             <a:extLst>
               <a:ext uri="{FF2B5EF4-FFF2-40B4-BE49-F238E27FC236}">
-                <a16:creationId xmlns:a16="http://schemas.microsoft.com/office/drawing/2014/main" id="{684A28E8-263A-B108-E2A2-50C199703F95}"/>
+                <a16:creationId xmlns:a16="http://schemas.microsoft.com/office/drawing/2014/main" id="{C82DB325-A22C-BF6B-A6BF-8EBD49F620CE}"/>
               </a:ext>
             </a:extLst>
           </p:cNvPr>
@@ -4604,8 +4606,8 @@
         </p:nvSpPr>
         <p:spPr>
           <a:xfrm>
-            <a:off x="2322695" y="908229"/>
-            <a:ext cx="8326548" cy="2769989"/>
+            <a:off x="1000125" y="1146354"/>
+            <a:ext cx="9649118" cy="461665"/>
           </a:xfrm>
           <a:prstGeom prst="rect">
             <a:avLst/>
@@ -4619,110 +4621,185 @@
           <a:lstStyle/>
           <a:p>
             <a:r>
-              <a:rPr lang="ko-KR" altLang="en-US" sz="2400" b="1" dirty="0" err="1"/>
-              <a:t>변분오토인코드</a:t>
-            </a:r>
-            <a:r>
-              <a:rPr lang="en-US" altLang="ko-KR" sz="2400" b="1" dirty="0"/>
-              <a:t>(VAE)</a:t>
-            </a:r>
-          </a:p>
-          <a:p>
-            <a:endParaRPr lang="en-US" altLang="ko-KR" sz="2400" b="1" dirty="0"/>
-          </a:p>
-          <a:p>
-            <a:pPr marL="342900" indent="-342900">
-              <a:buAutoNum type="arabicPeriod"/>
-            </a:pPr>
-            <a:r>
-              <a:rPr lang="ko-KR" altLang="en-US" dirty="0" err="1"/>
-              <a:t>오토인코더는</a:t>
-            </a:r>
-            <a:r>
-              <a:rPr lang="ko-KR" altLang="en-US" dirty="0"/>
-              <a:t> 입력데이터를 단순히 압축하고 복원한다</a:t>
-            </a:r>
-            <a:endParaRPr lang="en-US" altLang="ko-KR" dirty="0"/>
-          </a:p>
-          <a:p>
-            <a:pPr marL="342900" indent="-342900">
-              <a:buAutoNum type="arabicPeriod"/>
-            </a:pPr>
-            <a:r>
-              <a:rPr lang="en-US" altLang="ko-KR" dirty="0"/>
-              <a:t>VAE</a:t>
-            </a:r>
-            <a:r>
-              <a:rPr lang="ko-KR" altLang="en-US" dirty="0"/>
-              <a:t>는 특정 분포를 학습하여 </a:t>
-            </a:r>
-            <a:r>
-              <a:rPr lang="ko-KR" altLang="en-US" b="1" dirty="0"/>
-              <a:t>새로운 데이터를 생성할 수 있음</a:t>
-            </a:r>
-            <a:endParaRPr lang="en-US" altLang="ko-KR" b="1" dirty="0"/>
-          </a:p>
-          <a:p>
-            <a:pPr marL="342900" indent="-342900">
-              <a:buAutoNum type="arabicPeriod"/>
-            </a:pPr>
-            <a:r>
-              <a:rPr lang="ko-KR" altLang="en-US" dirty="0"/>
-              <a:t>잠재공간을 </a:t>
-            </a:r>
-            <a:r>
-              <a:rPr lang="ko-KR" altLang="en-US" dirty="0" err="1"/>
-              <a:t>편균과</a:t>
-            </a:r>
-            <a:r>
-              <a:rPr lang="ko-KR" altLang="en-US" dirty="0"/>
-              <a:t>  분산이 만드는 확률분포를 따른다</a:t>
-            </a:r>
-            <a:r>
-              <a:rPr lang="en-US" altLang="ko-KR" dirty="0"/>
-              <a:t>?</a:t>
+              <a:rPr lang="en-US" altLang="ko-KR" sz="2400" dirty="0">
+                <a:solidFill>
+                  <a:srgbClr val="FF0000"/>
+                </a:solidFill>
+              </a:rPr>
+              <a:t>“</a:t>
+            </a:r>
+            <a:r>
+              <a:rPr lang="ko-KR" altLang="en-US" sz="2400" dirty="0">
+                <a:solidFill>
+                  <a:srgbClr val="FF0000"/>
+                </a:solidFill>
+              </a:rPr>
+              <a:t>데이터를 설명하는 가장 핵심적인 정보만 남기고 나머지는 버려라</a:t>
+            </a:r>
+            <a:r>
+              <a:rPr lang="en-US" altLang="ko-KR" sz="2400" dirty="0">
+                <a:solidFill>
+                  <a:srgbClr val="FF0000"/>
+                </a:solidFill>
+              </a:rPr>
+              <a:t>”</a:t>
+            </a:r>
+            <a:endParaRPr lang="ko-KR" altLang="en-US" sz="2400" dirty="0">
+              <a:solidFill>
+                <a:srgbClr val="FF0000"/>
+              </a:solidFill>
+            </a:endParaRPr>
+          </a:p>
+        </p:txBody>
+      </p:sp>
+      <p:pic>
+        <p:nvPicPr>
+          <p:cNvPr id="2" name="Picture 2">
+            <a:extLst>
+              <a:ext uri="{FF2B5EF4-FFF2-40B4-BE49-F238E27FC236}">
+                <a16:creationId xmlns:a16="http://schemas.microsoft.com/office/drawing/2014/main" id="{D31F345A-D6F9-288B-D315-BC67C7BE7E28}"/>
+              </a:ext>
+            </a:extLst>
+          </p:cNvPr>
+          <p:cNvPicPr>
+            <a:picLocks noChangeAspect="1" noChangeArrowheads="1"/>
+          </p:cNvPicPr>
+          <p:nvPr/>
+        </p:nvPicPr>
+        <p:blipFill>
+          <a:blip r:embed="rId2">
+            <a:extLst>
+              <a:ext uri="{28A0092B-C50C-407E-A947-70E740481C1C}">
+                <a14:useLocalDpi xmlns:a14="http://schemas.microsoft.com/office/drawing/2010/main" val="0"/>
+              </a:ext>
+            </a:extLst>
+          </a:blip>
+          <a:srcRect/>
+          <a:stretch>
+            <a:fillRect/>
+          </a:stretch>
+        </p:blipFill>
+        <p:spPr bwMode="auto">
+          <a:xfrm>
+            <a:off x="2059781" y="2654121"/>
+            <a:ext cx="6667500" cy="3514725"/>
+          </a:xfrm>
+          <a:prstGeom prst="rect">
+            <a:avLst/>
+          </a:prstGeom>
+          <a:noFill/>
+          <a:extLst>
+            <a:ext uri="{909E8E84-426E-40DD-AFC4-6F175D3DCCD1}">
+              <a14:hiddenFill xmlns:a14="http://schemas.microsoft.com/office/drawing/2010/main">
+                <a:solidFill>
+                  <a:srgbClr val="FFFFFF"/>
+                </a:solidFill>
+              </a14:hiddenFill>
+            </a:ext>
+          </a:extLst>
+        </p:spPr>
+      </p:pic>
+      <p:sp>
+        <p:nvSpPr>
+          <p:cNvPr id="5" name="TextBox 4">
+            <a:extLst>
+              <a:ext uri="{FF2B5EF4-FFF2-40B4-BE49-F238E27FC236}">
+                <a16:creationId xmlns:a16="http://schemas.microsoft.com/office/drawing/2014/main" id="{D03933DA-C15D-F865-3640-18782B9254C0}"/>
+              </a:ext>
+            </a:extLst>
+          </p:cNvPr>
+          <p:cNvSpPr txBox="1"/>
+          <p:nvPr/>
+        </p:nvSpPr>
+        <p:spPr>
+          <a:xfrm>
+            <a:off x="373856" y="1982195"/>
+            <a:ext cx="5274469" cy="646331"/>
+          </a:xfrm>
+          <a:prstGeom prst="rect">
+            <a:avLst/>
+          </a:prstGeom>
+          <a:noFill/>
+        </p:spPr>
+        <p:txBody>
+          <a:bodyPr wrap="square">
+            <a:spAutoFit/>
+          </a:bodyPr>
+          <a:lstStyle/>
+          <a:p>
+            <a:r>
+              <a:rPr lang="en-US" altLang="ko-KR" dirty="0"/>
+              <a:t>Encoder</a:t>
+            </a:r>
+            <a:r>
+              <a:rPr lang="ko-KR" altLang="en-US" dirty="0"/>
+              <a:t>부분 더 작은 차원으로 압축</a:t>
             </a:r>
             <a:br>
               <a:rPr lang="en-US" altLang="ko-KR" dirty="0"/>
             </a:br>
             <a:r>
               <a:rPr lang="en-US" altLang="ko-KR" dirty="0"/>
-              <a:t>-&gt; </a:t>
-            </a:r>
-            <a:r>
-              <a:rPr lang="ko-KR" altLang="en-US" dirty="0"/>
-              <a:t>새로운 데이터 </a:t>
-            </a:r>
-            <a:r>
-              <a:rPr lang="ko-KR" altLang="en-US" dirty="0" err="1"/>
-              <a:t>만들수</a:t>
-            </a:r>
-            <a:r>
-              <a:rPr lang="ko-KR" altLang="en-US" dirty="0"/>
-              <a:t> 있음</a:t>
-            </a:r>
-            <a:endParaRPr lang="en-US" altLang="ko-KR" dirty="0"/>
-          </a:p>
-          <a:p>
-            <a:pPr marL="342900" indent="-342900">
-              <a:buAutoNum type="arabicPeriod"/>
-            </a:pPr>
-            <a:r>
-              <a:rPr lang="ko-KR" altLang="en-US" dirty="0"/>
-              <a:t>평균과 분산을 통해 잠재 공간 정보를 알 수 있어서 변형이 가능함</a:t>
-            </a:r>
-            <a:endParaRPr lang="en-US" altLang="ko-KR" dirty="0"/>
-          </a:p>
-          <a:p>
-            <a:pPr marL="342900" indent="-342900">
-              <a:buAutoNum type="arabicPeriod"/>
-            </a:pPr>
-            <a:endParaRPr lang="en-US" altLang="ko-KR" dirty="0"/>
-          </a:p>
-          <a:p>
-            <a:pPr marL="342900" indent="-342900">
-              <a:buAutoNum type="arabicPeriod"/>
-            </a:pPr>
+              <a:t>(</a:t>
+            </a:r>
+            <a:r>
+              <a:rPr lang="ko-KR" altLang="en-US" dirty="0"/>
+              <a:t>데이터의 중요한 특성을 얼마나 잘 잡아내느냐</a:t>
+            </a:r>
+            <a:r>
+              <a:rPr lang="en-US" altLang="ko-KR" dirty="0"/>
+              <a:t>)</a:t>
+            </a:r>
+          </a:p>
+        </p:txBody>
+      </p:sp>
+      <p:sp>
+        <p:nvSpPr>
+          <p:cNvPr id="10" name="TextBox 9">
+            <a:extLst>
+              <a:ext uri="{FF2B5EF4-FFF2-40B4-BE49-F238E27FC236}">
+                <a16:creationId xmlns:a16="http://schemas.microsoft.com/office/drawing/2014/main" id="{8E06F1C4-A209-A64B-34B0-AB226642B078}"/>
+              </a:ext>
+            </a:extLst>
+          </p:cNvPr>
+          <p:cNvSpPr txBox="1"/>
+          <p:nvPr/>
+        </p:nvSpPr>
+        <p:spPr>
+          <a:xfrm>
+            <a:off x="5824684" y="1999931"/>
+            <a:ext cx="6176816" cy="646331"/>
+          </a:xfrm>
+          <a:prstGeom prst="rect">
+            <a:avLst/>
+          </a:prstGeom>
+          <a:noFill/>
+        </p:spPr>
+        <p:txBody>
+          <a:bodyPr wrap="square">
+            <a:spAutoFit/>
+          </a:bodyPr>
+          <a:lstStyle/>
+          <a:p>
+            <a:r>
+              <a:rPr lang="en-US" altLang="ko-KR" dirty="0"/>
+              <a:t>Decoder </a:t>
+            </a:r>
+            <a:r>
+              <a:rPr lang="ko-KR" altLang="en-US" dirty="0"/>
+              <a:t>완벽하게 복원은 아니지만 원본에 가깝게 복원함 </a:t>
+            </a:r>
+            <a:br>
+              <a:rPr lang="en-US" altLang="ko-KR" dirty="0"/>
+            </a:br>
+            <a:r>
+              <a:rPr lang="en-US" altLang="ko-KR" dirty="0"/>
+              <a:t>-&gt; Latent Vector </a:t>
+            </a:r>
+            <a:r>
+              <a:rPr lang="ko-KR" altLang="en-US" dirty="0"/>
+              <a:t>잘 만들었는지 확인하는 과정</a:t>
+            </a:r>
             <a:endParaRPr lang="en-US" altLang="ko-KR" dirty="0"/>
           </a:p>
         </p:txBody>
@@ -4730,7 +4807,7 @@
     </p:spTree>
     <p:extLst>
       <p:ext uri="{BB962C8B-B14F-4D97-AF65-F5344CB8AC3E}">
-        <p14:creationId xmlns:p14="http://schemas.microsoft.com/office/powerpoint/2010/main" val="1504985892"/>
+        <p14:creationId xmlns:p14="http://schemas.microsoft.com/office/powerpoint/2010/main" val="2892317085"/>
       </p:ext>
     </p:extLst>
   </p:cSld>
@@ -4748,7 +4825,7 @@
         <p:cNvPr id="1" name="">
           <a:extLst>
             <a:ext uri="{FF2B5EF4-FFF2-40B4-BE49-F238E27FC236}">
-              <a16:creationId xmlns:a16="http://schemas.microsoft.com/office/drawing/2014/main" id="{41F4704B-09B9-B7EB-AB6F-91B12624A1D0}"/>
+              <a16:creationId xmlns:a16="http://schemas.microsoft.com/office/drawing/2014/main" id="{BABF9C64-D43A-0946-EB18-436357775267}"/>
             </a:ext>
           </a:extLst>
         </p:cNvPr>
@@ -4768,7 +4845,7 @@
           <p:cNvPr id="6" name="TextBox 5">
             <a:extLst>
               <a:ext uri="{FF2B5EF4-FFF2-40B4-BE49-F238E27FC236}">
-                <a16:creationId xmlns:a16="http://schemas.microsoft.com/office/drawing/2014/main" id="{7D290570-434A-DF98-F6B9-809E4905F191}"/>
+                <a16:creationId xmlns:a16="http://schemas.microsoft.com/office/drawing/2014/main" id="{EF47E660-2F45-835F-9B85-4B68F486FDFE}"/>
               </a:ext>
             </a:extLst>
           </p:cNvPr>
@@ -4812,7 +4889,7 @@
           <p:cNvPr id="7" name="TextBox 6">
             <a:extLst>
               <a:ext uri="{FF2B5EF4-FFF2-40B4-BE49-F238E27FC236}">
-                <a16:creationId xmlns:a16="http://schemas.microsoft.com/office/drawing/2014/main" id="{B632C3BA-F45B-A032-0795-2F760A56F0F4}"/>
+                <a16:creationId xmlns:a16="http://schemas.microsoft.com/office/drawing/2014/main" id="{FF43B723-424C-0389-94B3-DFDDC761098A}"/>
               </a:ext>
             </a:extLst>
           </p:cNvPr>
@@ -4822,7 +4899,7 @@
         <p:spPr>
           <a:xfrm>
             <a:off x="1163052" y="272716"/>
-            <a:ext cx="2997937" cy="523220"/>
+            <a:ext cx="2627642" cy="523220"/>
           </a:xfrm>
           <a:prstGeom prst="rect">
             <a:avLst/>
@@ -4836,12 +4913,12 @@
           <a:lstStyle/>
           <a:p>
             <a:r>
-              <a:rPr lang="en-US" altLang="ko-KR" sz="2800" b="1" dirty="0" err="1">
+              <a:rPr lang="ko-KR" altLang="en-US" sz="2800" b="1" dirty="0" err="1">
                 <a:solidFill>
                   <a:srgbClr val="00B0F0"/>
                 </a:solidFill>
               </a:rPr>
-              <a:t>GoogLeNet</a:t>
+              <a:t>오토인코더</a:t>
             </a:r>
             <a:r>
               <a:rPr lang="ko-KR" altLang="en-US" sz="2800" b="1" dirty="0">
@@ -4849,7 +4926,7 @@
                   <a:srgbClr val="00B0F0"/>
                 </a:solidFill>
               </a:rPr>
-              <a:t>이란</a:t>
+              <a:t> 란</a:t>
             </a:r>
             <a:r>
               <a:rPr lang="en-US" altLang="ko-KR" sz="2800" b="1" dirty="0">
@@ -4872,7 +4949,7 @@
           <p:cNvPr id="9" name="직선 연결선 8">
             <a:extLst>
               <a:ext uri="{FF2B5EF4-FFF2-40B4-BE49-F238E27FC236}">
-                <a16:creationId xmlns:a16="http://schemas.microsoft.com/office/drawing/2014/main" id="{A49B7D4C-2168-6A07-7195-2DB52BCC7483}"/>
+                <a16:creationId xmlns:a16="http://schemas.microsoft.com/office/drawing/2014/main" id="{A1C1B808-7926-70B9-B904-80E4747B4A78}"/>
               </a:ext>
             </a:extLst>
           </p:cNvPr>
@@ -4909,7 +4986,7 @@
           <p:cNvPr id="11" name="직선 연결선 10">
             <a:extLst>
               <a:ext uri="{FF2B5EF4-FFF2-40B4-BE49-F238E27FC236}">
-                <a16:creationId xmlns:a16="http://schemas.microsoft.com/office/drawing/2014/main" id="{757BFE86-7B7B-8B7B-F30A-7C47D5370DCD}"/>
+                <a16:creationId xmlns:a16="http://schemas.microsoft.com/office/drawing/2014/main" id="{E6FEB522-AE95-BABE-77B6-6FAEA092B4F8}"/>
               </a:ext>
             </a:extLst>
           </p:cNvPr>
@@ -4946,7 +5023,7 @@
           <p:cNvPr id="4" name="TextBox 3">
             <a:extLst>
               <a:ext uri="{FF2B5EF4-FFF2-40B4-BE49-F238E27FC236}">
-                <a16:creationId xmlns:a16="http://schemas.microsoft.com/office/drawing/2014/main" id="{60069F0E-EA69-7B20-695B-290E1E0D45F5}"/>
+                <a16:creationId xmlns:a16="http://schemas.microsoft.com/office/drawing/2014/main" id="{9F71AD8D-A9DE-D839-39EB-5F9F917981D8}"/>
               </a:ext>
             </a:extLst>
           </p:cNvPr>
@@ -4955,8 +5032,8 @@
         </p:nvSpPr>
         <p:spPr>
           <a:xfrm>
-            <a:off x="2322695" y="908229"/>
-            <a:ext cx="7542738" cy="1292662"/>
+            <a:off x="1930790" y="1870881"/>
+            <a:ext cx="8326548" cy="3116238"/>
           </a:xfrm>
           <a:prstGeom prst="rect">
             <a:avLst/>
@@ -4970,17 +5047,88 @@
           <a:lstStyle/>
           <a:p>
             <a:r>
-              <a:rPr lang="en-US" altLang="ko-KR" sz="2400" b="1" dirty="0"/>
-              <a:t>YOLO v1</a:t>
-            </a:r>
+              <a:rPr lang="en-US" altLang="ko-KR" sz="2400" b="1" dirty="0" err="1"/>
+              <a:t>AutoEncoder</a:t>
+            </a:r>
+            <a:endParaRPr lang="en-US" altLang="ko-KR" sz="2400" b="1" dirty="0"/>
+          </a:p>
+          <a:p>
+            <a:endParaRPr lang="en-US" altLang="ko-KR" sz="1050" b="1" dirty="0"/>
           </a:p>
           <a:p>
             <a:pPr marL="342900" indent="-342900">
               <a:buAutoNum type="arabicPeriod"/>
             </a:pPr>
             <a:r>
-              <a:rPr lang="ko-KR" altLang="en-US" dirty="0"/>
-              <a:t>빠르다</a:t>
+              <a:rPr lang="ko-KR" altLang="en-US" dirty="0" err="1"/>
+              <a:t>셀프지도</a:t>
+            </a:r>
+            <a:r>
+              <a:rPr lang="ko-KR" altLang="en-US" dirty="0"/>
+              <a:t> 학습</a:t>
+            </a:r>
+            <a:br>
+              <a:rPr lang="en-US" altLang="ko-KR" dirty="0"/>
+            </a:br>
+            <a:r>
+              <a:rPr lang="ko-KR" altLang="en-US" dirty="0" err="1"/>
+              <a:t>출력값이</a:t>
+            </a:r>
+            <a:r>
+              <a:rPr lang="ko-KR" altLang="en-US" dirty="0"/>
+              <a:t> 주어지지 않으며 주어진 데이터의 특성과 분포를 기반으로 설정됨</a:t>
+            </a:r>
+            <a:r>
+              <a:rPr lang="en-US" altLang="ko-KR" dirty="0"/>
+              <a:t>, </a:t>
+            </a:r>
+            <a:r>
+              <a:rPr lang="ko-KR" altLang="en-US" dirty="0"/>
+              <a:t>원본과 복원 간의 차이를 줄이면서 학습</a:t>
+            </a:r>
+            <a:endParaRPr lang="en-US" altLang="ko-KR" dirty="0"/>
+          </a:p>
+          <a:p>
+            <a:pPr marL="342900" indent="-342900">
+              <a:buAutoNum type="arabicPeriod"/>
+            </a:pPr>
+            <a:r>
+              <a:rPr lang="ko-KR" altLang="en-US" dirty="0"/>
+              <a:t>차원축소 </a:t>
+            </a:r>
+            <a:r>
+              <a:rPr lang="en-US" altLang="ko-KR" dirty="0"/>
+              <a:t>: </a:t>
+            </a:r>
+            <a:r>
+              <a:rPr lang="ko-KR" altLang="en-US" dirty="0"/>
+              <a:t>데이터의 특성을 줄임</a:t>
+            </a:r>
+            <a:r>
+              <a:rPr lang="en-US" altLang="ko-KR" dirty="0"/>
+              <a:t>,</a:t>
+            </a:r>
+            <a:r>
+              <a:rPr lang="ko-KR" altLang="en-US" dirty="0"/>
+              <a:t>노이즈 줄이고 데이터를 더 잘 이해함</a:t>
+            </a:r>
+            <a:r>
+              <a:rPr lang="en-US" altLang="ko-KR" dirty="0"/>
+              <a:t>, </a:t>
+            </a:r>
+            <a:r>
+              <a:rPr lang="ko-KR" altLang="en-US" dirty="0"/>
+              <a:t>불필요한 내용 없애기</a:t>
+            </a:r>
+            <a:endParaRPr lang="en-US" altLang="ko-KR" dirty="0"/>
+          </a:p>
+          <a:p>
+            <a:pPr marL="342900" indent="-342900">
+              <a:buAutoNum type="arabicPeriod"/>
+            </a:pPr>
+            <a:r>
+              <a:rPr lang="ko-KR" altLang="en-US" dirty="0"/>
+              <a:t>제한된 크기의 잠재 공간을 사용하여 최대한 근접하게 생성해내는 학습을 하는 과정에서 원본 데이터가 갖는 중요한 특성을 잡아냄</a:t>
             </a:r>
             <a:endParaRPr lang="en-US" altLang="ko-KR" dirty="0"/>
           </a:p>
@@ -5010,57 +5158,10 @@
           </a:p>
         </p:txBody>
       </p:sp>
-      <p:pic>
-        <p:nvPicPr>
-          <p:cNvPr id="1026" name="Picture 2" descr="딥러닝] GoogLeNet(Inception) 모델의 개요 및 특징">
-            <a:extLst>
-              <a:ext uri="{FF2B5EF4-FFF2-40B4-BE49-F238E27FC236}">
-                <a16:creationId xmlns:a16="http://schemas.microsoft.com/office/drawing/2014/main" id="{D99F4C1C-66A1-DD96-1CBC-1D895EFF2FF7}"/>
-              </a:ext>
-            </a:extLst>
-          </p:cNvPr>
-          <p:cNvPicPr>
-            <a:picLocks noChangeAspect="1" noChangeArrowheads="1"/>
-          </p:cNvPicPr>
-          <p:nvPr/>
-        </p:nvPicPr>
-        <p:blipFill>
-          <a:blip r:embed="rId2">
-            <a:extLst>
-              <a:ext uri="{28A0092B-C50C-407E-A947-70E740481C1C}">
-                <a14:useLocalDpi xmlns:a14="http://schemas.microsoft.com/office/drawing/2010/main" val="0"/>
-              </a:ext>
-            </a:extLst>
-          </a:blip>
-          <a:srcRect/>
-          <a:stretch>
-            <a:fillRect/>
-          </a:stretch>
-        </p:blipFill>
-        <p:spPr bwMode="auto">
-          <a:xfrm>
-            <a:off x="-1936" y="3788762"/>
-            <a:ext cx="12192000" cy="2724150"/>
-          </a:xfrm>
-          <a:prstGeom prst="rect">
-            <a:avLst/>
-          </a:prstGeom>
-          <a:noFill/>
-          <a:extLst>
-            <a:ext uri="{909E8E84-426E-40DD-AFC4-6F175D3DCCD1}">
-              <a14:hiddenFill xmlns:a14="http://schemas.microsoft.com/office/drawing/2010/main">
-                <a:solidFill>
-                  <a:srgbClr val="FFFFFF"/>
-                </a:solidFill>
-              </a14:hiddenFill>
-            </a:ext>
-          </a:extLst>
-        </p:spPr>
-      </p:pic>
     </p:spTree>
     <p:extLst>
       <p:ext uri="{BB962C8B-B14F-4D97-AF65-F5344CB8AC3E}">
-        <p14:creationId xmlns:p14="http://schemas.microsoft.com/office/powerpoint/2010/main" val="2994115566"/>
+        <p14:creationId xmlns:p14="http://schemas.microsoft.com/office/powerpoint/2010/main" val="3834744969"/>
       </p:ext>
     </p:extLst>
   </p:cSld>
@@ -5071,6 +5172,651 @@
 </file>
 
 <file path=ppt/slides/slide12.xml><?xml version="1.0" encoding="utf-8"?>
+<p:sld xmlns:a="http://schemas.openxmlformats.org/drawingml/2006/main" xmlns:r="http://schemas.openxmlformats.org/officeDocument/2006/relationships" xmlns:p="http://schemas.openxmlformats.org/presentationml/2006/main">
+  <p:cSld>
+    <p:spTree>
+      <p:nvGrpSpPr>
+        <p:cNvPr id="1" name="">
+          <a:extLst>
+            <a:ext uri="{FF2B5EF4-FFF2-40B4-BE49-F238E27FC236}">
+              <a16:creationId xmlns:a16="http://schemas.microsoft.com/office/drawing/2014/main" id="{DC84DEF3-CFBC-6E18-2DDA-A3D80D6785A3}"/>
+            </a:ext>
+          </a:extLst>
+        </p:cNvPr>
+        <p:cNvGrpSpPr/>
+        <p:nvPr/>
+      </p:nvGrpSpPr>
+      <p:grpSpPr>
+        <a:xfrm>
+          <a:off x="0" y="0"/>
+          <a:ext cx="0" cy="0"/>
+          <a:chOff x="0" y="0"/>
+          <a:chExt cx="0" cy="0"/>
+        </a:xfrm>
+      </p:grpSpPr>
+      <p:sp>
+        <p:nvSpPr>
+          <p:cNvPr id="6" name="TextBox 5">
+            <a:extLst>
+              <a:ext uri="{FF2B5EF4-FFF2-40B4-BE49-F238E27FC236}">
+                <a16:creationId xmlns:a16="http://schemas.microsoft.com/office/drawing/2014/main" id="{EC11610C-E457-6101-E4A0-45E7B802515D}"/>
+              </a:ext>
+            </a:extLst>
+          </p:cNvPr>
+          <p:cNvSpPr txBox="1"/>
+          <p:nvPr/>
+        </p:nvSpPr>
+        <p:spPr>
+          <a:xfrm>
+            <a:off x="144378" y="272716"/>
+            <a:ext cx="736997" cy="338554"/>
+          </a:xfrm>
+          <a:prstGeom prst="rect">
+            <a:avLst/>
+          </a:prstGeom>
+          <a:noFill/>
+        </p:spPr>
+        <p:txBody>
+          <a:bodyPr wrap="none" rtlCol="0">
+            <a:spAutoFit/>
+          </a:bodyPr>
+          <a:lstStyle/>
+          <a:p>
+            <a:r>
+              <a:rPr lang="en-US" altLang="ko-KR" sz="1600" dirty="0">
+                <a:solidFill>
+                  <a:srgbClr val="00B0F0"/>
+                </a:solidFill>
+              </a:rPr>
+              <a:t>Part 0</a:t>
+            </a:r>
+            <a:endParaRPr lang="ko-KR" altLang="en-US" sz="1600" dirty="0">
+              <a:solidFill>
+                <a:srgbClr val="00B0F0"/>
+              </a:solidFill>
+            </a:endParaRPr>
+          </a:p>
+        </p:txBody>
+      </p:sp>
+      <p:sp>
+        <p:nvSpPr>
+          <p:cNvPr id="7" name="TextBox 6">
+            <a:extLst>
+              <a:ext uri="{FF2B5EF4-FFF2-40B4-BE49-F238E27FC236}">
+                <a16:creationId xmlns:a16="http://schemas.microsoft.com/office/drawing/2014/main" id="{B92841D9-EC5F-DC7B-AC24-9D06B23223D1}"/>
+              </a:ext>
+            </a:extLst>
+          </p:cNvPr>
+          <p:cNvSpPr txBox="1"/>
+          <p:nvPr/>
+        </p:nvSpPr>
+        <p:spPr>
+          <a:xfrm>
+            <a:off x="1163052" y="272716"/>
+            <a:ext cx="2627642" cy="523220"/>
+          </a:xfrm>
+          <a:prstGeom prst="rect">
+            <a:avLst/>
+          </a:prstGeom>
+          <a:noFill/>
+        </p:spPr>
+        <p:txBody>
+          <a:bodyPr wrap="none" rtlCol="0">
+            <a:spAutoFit/>
+          </a:bodyPr>
+          <a:lstStyle/>
+          <a:p>
+            <a:r>
+              <a:rPr lang="ko-KR" altLang="en-US" sz="2800" b="1" dirty="0" err="1">
+                <a:solidFill>
+                  <a:srgbClr val="00B0F0"/>
+                </a:solidFill>
+              </a:rPr>
+              <a:t>오토인코더</a:t>
+            </a:r>
+            <a:r>
+              <a:rPr lang="ko-KR" altLang="en-US" sz="2800" b="1" dirty="0">
+                <a:solidFill>
+                  <a:srgbClr val="00B0F0"/>
+                </a:solidFill>
+              </a:rPr>
+              <a:t> 란</a:t>
+            </a:r>
+            <a:r>
+              <a:rPr lang="en-US" altLang="ko-KR" sz="2800" b="1" dirty="0">
+                <a:solidFill>
+                  <a:srgbClr val="00B0F0"/>
+                </a:solidFill>
+              </a:rPr>
+              <a:t>?</a:t>
+            </a:r>
+            <a:endParaRPr lang="ko-KR" altLang="en-US" sz="2800" b="1" dirty="0">
+              <a:solidFill>
+                <a:srgbClr val="00B0F0"/>
+              </a:solidFill>
+            </a:endParaRPr>
+          </a:p>
+        </p:txBody>
+      </p:sp>
+      <p:cxnSp>
+        <p:nvCxnSpPr>
+          <p:cNvPr id="9" name="직선 연결선 8">
+            <a:extLst>
+              <a:ext uri="{FF2B5EF4-FFF2-40B4-BE49-F238E27FC236}">
+                <a16:creationId xmlns:a16="http://schemas.microsoft.com/office/drawing/2014/main" id="{0232D44E-2A0A-FF83-D86C-7F808DB02864}"/>
+              </a:ext>
+            </a:extLst>
+          </p:cNvPr>
+          <p:cNvCxnSpPr/>
+          <p:nvPr/>
+        </p:nvCxnSpPr>
+        <p:spPr>
+          <a:xfrm>
+            <a:off x="144378" y="160422"/>
+            <a:ext cx="12060000" cy="0"/>
+          </a:xfrm>
+          <a:prstGeom prst="line">
+            <a:avLst/>
+          </a:prstGeom>
+          <a:ln w="57150"/>
+        </p:spPr>
+        <p:style>
+          <a:lnRef idx="1">
+            <a:schemeClr val="accent4"/>
+          </a:lnRef>
+          <a:fillRef idx="0">
+            <a:schemeClr val="accent4"/>
+          </a:fillRef>
+          <a:effectRef idx="0">
+            <a:schemeClr val="accent4"/>
+          </a:effectRef>
+          <a:fontRef idx="minor">
+            <a:schemeClr val="tx1"/>
+          </a:fontRef>
+        </p:style>
+      </p:cxnSp>
+      <p:cxnSp>
+        <p:nvCxnSpPr>
+          <p:cNvPr id="11" name="직선 연결선 10">
+            <a:extLst>
+              <a:ext uri="{FF2B5EF4-FFF2-40B4-BE49-F238E27FC236}">
+                <a16:creationId xmlns:a16="http://schemas.microsoft.com/office/drawing/2014/main" id="{E83E2637-8261-9113-C8E7-FDEAAD67EE75}"/>
+              </a:ext>
+            </a:extLst>
+          </p:cNvPr>
+          <p:cNvCxnSpPr/>
+          <p:nvPr/>
+        </p:nvCxnSpPr>
+        <p:spPr>
+          <a:xfrm>
+            <a:off x="64064" y="6697578"/>
+            <a:ext cx="12060000" cy="0"/>
+          </a:xfrm>
+          <a:prstGeom prst="line">
+            <a:avLst/>
+          </a:prstGeom>
+          <a:ln/>
+        </p:spPr>
+        <p:style>
+          <a:lnRef idx="1">
+            <a:schemeClr val="accent4"/>
+          </a:lnRef>
+          <a:fillRef idx="0">
+            <a:schemeClr val="accent4"/>
+          </a:fillRef>
+          <a:effectRef idx="0">
+            <a:schemeClr val="accent4"/>
+          </a:effectRef>
+          <a:fontRef idx="minor">
+            <a:schemeClr val="tx1"/>
+          </a:fontRef>
+        </p:style>
+      </p:cxnSp>
+      <p:sp>
+        <p:nvSpPr>
+          <p:cNvPr id="4" name="TextBox 3">
+            <a:extLst>
+              <a:ext uri="{FF2B5EF4-FFF2-40B4-BE49-F238E27FC236}">
+                <a16:creationId xmlns:a16="http://schemas.microsoft.com/office/drawing/2014/main" id="{C6885507-06B1-CE24-15F2-F956B1E8D275}"/>
+              </a:ext>
+            </a:extLst>
+          </p:cNvPr>
+          <p:cNvSpPr txBox="1"/>
+          <p:nvPr/>
+        </p:nvSpPr>
+        <p:spPr>
+          <a:xfrm>
+            <a:off x="1930790" y="1870881"/>
+            <a:ext cx="8326548" cy="1454244"/>
+          </a:xfrm>
+          <a:prstGeom prst="rect">
+            <a:avLst/>
+          </a:prstGeom>
+          <a:noFill/>
+        </p:spPr>
+        <p:txBody>
+          <a:bodyPr wrap="square" rtlCol="0">
+            <a:spAutoFit/>
+          </a:bodyPr>
+          <a:lstStyle/>
+          <a:p>
+            <a:r>
+              <a:rPr lang="ko-KR" altLang="en-US" sz="2400" b="1" dirty="0"/>
+              <a:t>사용처</a:t>
+            </a:r>
+            <a:endParaRPr lang="en-US" altLang="ko-KR" sz="2400" b="1" dirty="0"/>
+          </a:p>
+          <a:p>
+            <a:endParaRPr lang="en-US" altLang="ko-KR" sz="1050" b="1" dirty="0"/>
+          </a:p>
+          <a:p>
+            <a:pPr marL="342900" indent="-342900">
+              <a:buAutoNum type="arabicPeriod"/>
+            </a:pPr>
+            <a:r>
+              <a:rPr lang="en-US" altLang="ko-KR" dirty="0"/>
+              <a:t>Input Data</a:t>
+            </a:r>
+            <a:r>
+              <a:rPr lang="ko-KR" altLang="en-US" dirty="0"/>
+              <a:t>의 </a:t>
+            </a:r>
+            <a:r>
+              <a:rPr lang="en-US" altLang="ko-KR" dirty="0"/>
+              <a:t>Feature</a:t>
+            </a:r>
+            <a:r>
+              <a:rPr lang="ko-KR" altLang="en-US" dirty="0"/>
+              <a:t>를 추출할 때 사용</a:t>
+            </a:r>
+            <a:endParaRPr lang="en-US" altLang="ko-KR" dirty="0"/>
+          </a:p>
+          <a:p>
+            <a:pPr marL="342900" indent="-342900">
+              <a:buAutoNum type="arabicPeriod"/>
+            </a:pPr>
+            <a:r>
+              <a:rPr lang="ko-KR" altLang="en-US" dirty="0"/>
+              <a:t>가중치 초기화</a:t>
+            </a:r>
+            <a:r>
+              <a:rPr lang="en-US" altLang="ko-KR" dirty="0"/>
+              <a:t>…</a:t>
+            </a:r>
+          </a:p>
+          <a:p>
+            <a:pPr marL="342900" indent="-342900">
+              <a:buAutoNum type="arabicPeriod"/>
+            </a:pPr>
+            <a:endParaRPr lang="ko-KR" altLang="en-US" dirty="0"/>
+          </a:p>
+        </p:txBody>
+      </p:sp>
+    </p:spTree>
+    <p:extLst>
+      <p:ext uri="{BB962C8B-B14F-4D97-AF65-F5344CB8AC3E}">
+        <p14:creationId xmlns:p14="http://schemas.microsoft.com/office/powerpoint/2010/main" val="4126654777"/>
+      </p:ext>
+    </p:extLst>
+  </p:cSld>
+  <p:clrMapOvr>
+    <a:masterClrMapping/>
+  </p:clrMapOvr>
+</p:sld>
+</file>
+
+<file path=ppt/slides/slide13.xml><?xml version="1.0" encoding="utf-8"?>
+<p:sld xmlns:a="http://schemas.openxmlformats.org/drawingml/2006/main" xmlns:r="http://schemas.openxmlformats.org/officeDocument/2006/relationships" xmlns:p="http://schemas.openxmlformats.org/presentationml/2006/main">
+  <p:cSld>
+    <p:spTree>
+      <p:nvGrpSpPr>
+        <p:cNvPr id="1" name="">
+          <a:extLst>
+            <a:ext uri="{FF2B5EF4-FFF2-40B4-BE49-F238E27FC236}">
+              <a16:creationId xmlns:a16="http://schemas.microsoft.com/office/drawing/2014/main" id="{257AC50A-CEF8-ACE1-5866-0C0F3905AA3B}"/>
+            </a:ext>
+          </a:extLst>
+        </p:cNvPr>
+        <p:cNvGrpSpPr/>
+        <p:nvPr/>
+      </p:nvGrpSpPr>
+      <p:grpSpPr>
+        <a:xfrm>
+          <a:off x="0" y="0"/>
+          <a:ext cx="0" cy="0"/>
+          <a:chOff x="0" y="0"/>
+          <a:chExt cx="0" cy="0"/>
+        </a:xfrm>
+      </p:grpSpPr>
+      <p:sp>
+        <p:nvSpPr>
+          <p:cNvPr id="6" name="TextBox 5">
+            <a:extLst>
+              <a:ext uri="{FF2B5EF4-FFF2-40B4-BE49-F238E27FC236}">
+                <a16:creationId xmlns:a16="http://schemas.microsoft.com/office/drawing/2014/main" id="{B09E3D56-3BE6-10E0-99D5-DCE6B26BD403}"/>
+              </a:ext>
+            </a:extLst>
+          </p:cNvPr>
+          <p:cNvSpPr txBox="1"/>
+          <p:nvPr/>
+        </p:nvSpPr>
+        <p:spPr>
+          <a:xfrm>
+            <a:off x="144378" y="272716"/>
+            <a:ext cx="736997" cy="338554"/>
+          </a:xfrm>
+          <a:prstGeom prst="rect">
+            <a:avLst/>
+          </a:prstGeom>
+          <a:noFill/>
+        </p:spPr>
+        <p:txBody>
+          <a:bodyPr wrap="none" rtlCol="0">
+            <a:spAutoFit/>
+          </a:bodyPr>
+          <a:lstStyle/>
+          <a:p>
+            <a:r>
+              <a:rPr lang="en-US" altLang="ko-KR" sz="1600" dirty="0">
+                <a:solidFill>
+                  <a:srgbClr val="00B0F0"/>
+                </a:solidFill>
+              </a:rPr>
+              <a:t>Part 0</a:t>
+            </a:r>
+            <a:endParaRPr lang="ko-KR" altLang="en-US" sz="1600" dirty="0">
+              <a:solidFill>
+                <a:srgbClr val="00B0F0"/>
+              </a:solidFill>
+            </a:endParaRPr>
+          </a:p>
+        </p:txBody>
+      </p:sp>
+      <p:sp>
+        <p:nvSpPr>
+          <p:cNvPr id="7" name="TextBox 6">
+            <a:extLst>
+              <a:ext uri="{FF2B5EF4-FFF2-40B4-BE49-F238E27FC236}">
+                <a16:creationId xmlns:a16="http://schemas.microsoft.com/office/drawing/2014/main" id="{5D60B7E0-5031-3F06-75FC-BF25229821B3}"/>
+              </a:ext>
+            </a:extLst>
+          </p:cNvPr>
+          <p:cNvSpPr txBox="1"/>
+          <p:nvPr/>
+        </p:nvSpPr>
+        <p:spPr>
+          <a:xfrm>
+            <a:off x="1163052" y="272716"/>
+            <a:ext cx="2627642" cy="523220"/>
+          </a:xfrm>
+          <a:prstGeom prst="rect">
+            <a:avLst/>
+          </a:prstGeom>
+          <a:noFill/>
+        </p:spPr>
+        <p:txBody>
+          <a:bodyPr wrap="none" rtlCol="0">
+            <a:spAutoFit/>
+          </a:bodyPr>
+          <a:lstStyle/>
+          <a:p>
+            <a:r>
+              <a:rPr lang="ko-KR" altLang="en-US" sz="2800" b="1" dirty="0" err="1">
+                <a:solidFill>
+                  <a:srgbClr val="00B0F0"/>
+                </a:solidFill>
+              </a:rPr>
+              <a:t>오토인코더</a:t>
+            </a:r>
+            <a:r>
+              <a:rPr lang="ko-KR" altLang="en-US" sz="2800" b="1" dirty="0">
+                <a:solidFill>
+                  <a:srgbClr val="00B0F0"/>
+                </a:solidFill>
+              </a:rPr>
+              <a:t> 란</a:t>
+            </a:r>
+            <a:r>
+              <a:rPr lang="en-US" altLang="ko-KR" sz="2800" b="1" dirty="0">
+                <a:solidFill>
+                  <a:srgbClr val="00B0F0"/>
+                </a:solidFill>
+              </a:rPr>
+              <a:t>?</a:t>
+            </a:r>
+            <a:endParaRPr lang="ko-KR" altLang="en-US" sz="2800" b="1" dirty="0">
+              <a:solidFill>
+                <a:srgbClr val="00B0F0"/>
+              </a:solidFill>
+            </a:endParaRPr>
+          </a:p>
+        </p:txBody>
+      </p:sp>
+      <p:cxnSp>
+        <p:nvCxnSpPr>
+          <p:cNvPr id="9" name="직선 연결선 8">
+            <a:extLst>
+              <a:ext uri="{FF2B5EF4-FFF2-40B4-BE49-F238E27FC236}">
+                <a16:creationId xmlns:a16="http://schemas.microsoft.com/office/drawing/2014/main" id="{38E762AF-C0F1-6B85-9E78-A1F1C31D41AB}"/>
+              </a:ext>
+            </a:extLst>
+          </p:cNvPr>
+          <p:cNvCxnSpPr/>
+          <p:nvPr/>
+        </p:nvCxnSpPr>
+        <p:spPr>
+          <a:xfrm>
+            <a:off x="144378" y="160422"/>
+            <a:ext cx="12060000" cy="0"/>
+          </a:xfrm>
+          <a:prstGeom prst="line">
+            <a:avLst/>
+          </a:prstGeom>
+          <a:ln w="57150"/>
+        </p:spPr>
+        <p:style>
+          <a:lnRef idx="1">
+            <a:schemeClr val="accent4"/>
+          </a:lnRef>
+          <a:fillRef idx="0">
+            <a:schemeClr val="accent4"/>
+          </a:fillRef>
+          <a:effectRef idx="0">
+            <a:schemeClr val="accent4"/>
+          </a:effectRef>
+          <a:fontRef idx="minor">
+            <a:schemeClr val="tx1"/>
+          </a:fontRef>
+        </p:style>
+      </p:cxnSp>
+      <p:cxnSp>
+        <p:nvCxnSpPr>
+          <p:cNvPr id="11" name="직선 연결선 10">
+            <a:extLst>
+              <a:ext uri="{FF2B5EF4-FFF2-40B4-BE49-F238E27FC236}">
+                <a16:creationId xmlns:a16="http://schemas.microsoft.com/office/drawing/2014/main" id="{FFABD335-1168-C4B0-E267-A43C9B96103D}"/>
+              </a:ext>
+            </a:extLst>
+          </p:cNvPr>
+          <p:cNvCxnSpPr/>
+          <p:nvPr/>
+        </p:nvCxnSpPr>
+        <p:spPr>
+          <a:xfrm>
+            <a:off x="64064" y="6697578"/>
+            <a:ext cx="12060000" cy="0"/>
+          </a:xfrm>
+          <a:prstGeom prst="line">
+            <a:avLst/>
+          </a:prstGeom>
+          <a:ln/>
+        </p:spPr>
+        <p:style>
+          <a:lnRef idx="1">
+            <a:schemeClr val="accent4"/>
+          </a:lnRef>
+          <a:fillRef idx="0">
+            <a:schemeClr val="accent4"/>
+          </a:fillRef>
+          <a:effectRef idx="0">
+            <a:schemeClr val="accent4"/>
+          </a:effectRef>
+          <a:fontRef idx="minor">
+            <a:schemeClr val="tx1"/>
+          </a:fontRef>
+        </p:style>
+      </p:cxnSp>
+      <p:sp>
+        <p:nvSpPr>
+          <p:cNvPr id="4" name="TextBox 3">
+            <a:extLst>
+              <a:ext uri="{FF2B5EF4-FFF2-40B4-BE49-F238E27FC236}">
+                <a16:creationId xmlns:a16="http://schemas.microsoft.com/office/drawing/2014/main" id="{684A28E8-263A-B108-E2A2-50C199703F95}"/>
+              </a:ext>
+            </a:extLst>
+          </p:cNvPr>
+          <p:cNvSpPr txBox="1"/>
+          <p:nvPr/>
+        </p:nvSpPr>
+        <p:spPr>
+          <a:xfrm>
+            <a:off x="2322695" y="908229"/>
+            <a:ext cx="8326548" cy="2769989"/>
+          </a:xfrm>
+          <a:prstGeom prst="rect">
+            <a:avLst/>
+          </a:prstGeom>
+          <a:noFill/>
+        </p:spPr>
+        <p:txBody>
+          <a:bodyPr wrap="square" rtlCol="0">
+            <a:spAutoFit/>
+          </a:bodyPr>
+          <a:lstStyle/>
+          <a:p>
+            <a:r>
+              <a:rPr lang="ko-KR" altLang="en-US" sz="2400" b="1" dirty="0" err="1"/>
+              <a:t>변분오토인코드</a:t>
+            </a:r>
+            <a:r>
+              <a:rPr lang="en-US" altLang="ko-KR" sz="2400" b="1" dirty="0"/>
+              <a:t>(VAE)</a:t>
+            </a:r>
+          </a:p>
+          <a:p>
+            <a:endParaRPr lang="en-US" altLang="ko-KR" sz="2400" b="1" dirty="0"/>
+          </a:p>
+          <a:p>
+            <a:pPr marL="342900" indent="-342900">
+              <a:buAutoNum type="arabicPeriod"/>
+            </a:pPr>
+            <a:r>
+              <a:rPr lang="ko-KR" altLang="en-US" dirty="0" err="1"/>
+              <a:t>오토인코더는</a:t>
+            </a:r>
+            <a:r>
+              <a:rPr lang="ko-KR" altLang="en-US" dirty="0"/>
+              <a:t> 입력데이터를 단순히 압축하고 복원한다</a:t>
+            </a:r>
+            <a:endParaRPr lang="en-US" altLang="ko-KR" dirty="0"/>
+          </a:p>
+          <a:p>
+            <a:pPr marL="342900" indent="-342900">
+              <a:buAutoNum type="arabicPeriod"/>
+            </a:pPr>
+            <a:r>
+              <a:rPr lang="en-US" altLang="ko-KR" dirty="0"/>
+              <a:t>VAE</a:t>
+            </a:r>
+            <a:r>
+              <a:rPr lang="ko-KR" altLang="en-US" dirty="0"/>
+              <a:t>는 특정 분포를 학습하여 </a:t>
+            </a:r>
+            <a:r>
+              <a:rPr lang="ko-KR" altLang="en-US" b="1" dirty="0"/>
+              <a:t>새로운 데이터를 생성할 수 있음</a:t>
+            </a:r>
+            <a:endParaRPr lang="en-US" altLang="ko-KR" b="1" dirty="0"/>
+          </a:p>
+          <a:p>
+            <a:pPr marL="342900" indent="-342900">
+              <a:buAutoNum type="arabicPeriod"/>
+            </a:pPr>
+            <a:r>
+              <a:rPr lang="ko-KR" altLang="en-US" dirty="0"/>
+              <a:t>잠재공간을 </a:t>
+            </a:r>
+            <a:r>
+              <a:rPr lang="ko-KR" altLang="en-US" dirty="0" err="1"/>
+              <a:t>편균과</a:t>
+            </a:r>
+            <a:r>
+              <a:rPr lang="ko-KR" altLang="en-US" dirty="0"/>
+              <a:t>  분산이 만드는 확률분포를 따른다</a:t>
+            </a:r>
+            <a:r>
+              <a:rPr lang="en-US" altLang="ko-KR" dirty="0"/>
+              <a:t>?</a:t>
+            </a:r>
+            <a:br>
+              <a:rPr lang="en-US" altLang="ko-KR" dirty="0"/>
+            </a:br>
+            <a:r>
+              <a:rPr lang="en-US" altLang="ko-KR" dirty="0"/>
+              <a:t>-&gt; </a:t>
+            </a:r>
+            <a:r>
+              <a:rPr lang="ko-KR" altLang="en-US" dirty="0"/>
+              <a:t>새로운 데이터 </a:t>
+            </a:r>
+            <a:r>
+              <a:rPr lang="ko-KR" altLang="en-US" dirty="0" err="1"/>
+              <a:t>만들수</a:t>
+            </a:r>
+            <a:r>
+              <a:rPr lang="ko-KR" altLang="en-US" dirty="0"/>
+              <a:t> 있음</a:t>
+            </a:r>
+            <a:endParaRPr lang="en-US" altLang="ko-KR" dirty="0"/>
+          </a:p>
+          <a:p>
+            <a:pPr marL="342900" indent="-342900">
+              <a:buAutoNum type="arabicPeriod"/>
+            </a:pPr>
+            <a:r>
+              <a:rPr lang="ko-KR" altLang="en-US" dirty="0"/>
+              <a:t>평균과 분산을 통해 잠재 공간 정보를 알 수 있어서 변형이 가능함</a:t>
+            </a:r>
+            <a:endParaRPr lang="en-US" altLang="ko-KR" dirty="0"/>
+          </a:p>
+          <a:p>
+            <a:pPr marL="342900" indent="-342900">
+              <a:buAutoNum type="arabicPeriod"/>
+            </a:pPr>
+            <a:endParaRPr lang="en-US" altLang="ko-KR" dirty="0"/>
+          </a:p>
+          <a:p>
+            <a:pPr marL="342900" indent="-342900">
+              <a:buAutoNum type="arabicPeriod"/>
+            </a:pPr>
+            <a:endParaRPr lang="en-US" altLang="ko-KR" dirty="0"/>
+          </a:p>
+        </p:txBody>
+      </p:sp>
+    </p:spTree>
+    <p:extLst>
+      <p:ext uri="{BB962C8B-B14F-4D97-AF65-F5344CB8AC3E}">
+        <p14:creationId xmlns:p14="http://schemas.microsoft.com/office/powerpoint/2010/main" val="1504985892"/>
+      </p:ext>
+    </p:extLst>
+  </p:cSld>
+  <p:clrMapOvr>
+    <a:masterClrMapping/>
+  </p:clrMapOvr>
+</p:sld>
+</file>
+
+<file path=ppt/slides/slide14.xml><?xml version="1.0" encoding="utf-8"?>
 <p:sld xmlns:a="http://schemas.openxmlformats.org/drawingml/2006/main" xmlns:r="http://schemas.openxmlformats.org/officeDocument/2006/relationships" xmlns:p="http://schemas.openxmlformats.org/presentationml/2006/main">
   <p:cSld>
     <p:spTree>
@@ -5232,7 +5978,7 @@
 </p:sld>
 </file>
 
-<file path=ppt/slides/slide13.xml><?xml version="1.0" encoding="utf-8"?>
+<file path=ppt/slides/slide15.xml><?xml version="1.0" encoding="utf-8"?>
 <p:sld xmlns:a="http://schemas.openxmlformats.org/drawingml/2006/main" xmlns:r="http://schemas.openxmlformats.org/officeDocument/2006/relationships" xmlns:p="http://schemas.openxmlformats.org/presentationml/2006/main">
   <p:cSld>
     <p:spTree>
@@ -5529,7 +6275,7 @@
 </p:sld>
 </file>
 
-<file path=ppt/slides/slide14.xml><?xml version="1.0" encoding="utf-8"?>
+<file path=ppt/slides/slide16.xml><?xml version="1.0" encoding="utf-8"?>
 <p:sld xmlns:a="http://schemas.openxmlformats.org/drawingml/2006/main" xmlns:r="http://schemas.openxmlformats.org/officeDocument/2006/relationships" xmlns:p="http://schemas.openxmlformats.org/presentationml/2006/main">
   <p:cSld>
     <p:spTree>
@@ -6139,7 +6885,7 @@
 </p:sld>
 </file>
 
-<file path=ppt/slides/slide15.xml><?xml version="1.0" encoding="utf-8"?>
+<file path=ppt/slides/slide17.xml><?xml version="1.0" encoding="utf-8"?>
 <p:sld xmlns:a="http://schemas.openxmlformats.org/drawingml/2006/main" xmlns:r="http://schemas.openxmlformats.org/officeDocument/2006/relationships" xmlns:p="http://schemas.openxmlformats.org/presentationml/2006/main">
   <p:cSld>
     <p:spTree>
@@ -6631,7 +7377,7 @@
 </p:sld>
 </file>
 
-<file path=ppt/slides/slide16.xml><?xml version="1.0" encoding="utf-8"?>
+<file path=ppt/slides/slide18.xml><?xml version="1.0" encoding="utf-8"?>
 <p:sld xmlns:a="http://schemas.openxmlformats.org/drawingml/2006/main" xmlns:r="http://schemas.openxmlformats.org/officeDocument/2006/relationships" xmlns:p="http://schemas.openxmlformats.org/presentationml/2006/main">
   <p:cSld>
     <p:spTree>
@@ -7076,7 +7822,7 @@
 </p:sld>
 </file>
 
-<file path=ppt/slides/slide17.xml><?xml version="1.0" encoding="utf-8"?>
+<file path=ppt/slides/slide19.xml><?xml version="1.0" encoding="utf-8"?>
 <p:sld xmlns:a="http://schemas.openxmlformats.org/drawingml/2006/main" xmlns:r="http://schemas.openxmlformats.org/officeDocument/2006/relationships" xmlns:p="http://schemas.openxmlformats.org/presentationml/2006/main">
   <p:cSld>
     <p:spTree>
@@ -11574,7 +12320,7 @@
         <p:spPr>
           <a:xfrm>
             <a:off x="783638" y="1397618"/>
-            <a:ext cx="10493961" cy="1477328"/>
+            <a:ext cx="10493961" cy="646331"/>
           </a:xfrm>
           <a:prstGeom prst="rect">
             <a:avLst/>
@@ -11592,133 +12338,48 @@
               <a:buChar char="•"/>
             </a:pPr>
             <a:r>
-              <a:rPr lang="en-US" altLang="ko-KR" dirty="0"/>
-              <a:t>50</a:t>
-            </a:r>
-            <a:r>
-              <a:rPr lang="ko-KR" altLang="en-US" dirty="0"/>
-              <a:t>층 이상 깊은 </a:t>
-            </a:r>
-            <a:r>
-              <a:rPr lang="en-US" altLang="ko-KR" dirty="0" err="1"/>
-              <a:t>ResNet</a:t>
-            </a:r>
-            <a:r>
-              <a:rPr lang="ko-KR" altLang="en-US" dirty="0"/>
-              <a:t>에선 </a:t>
-            </a:r>
-            <a:r>
-              <a:rPr lang="en-US" altLang="ko-KR" dirty="0"/>
-              <a:t>Bottleneck </a:t>
-            </a:r>
-            <a:r>
-              <a:rPr lang="ko-KR" altLang="en-US" dirty="0"/>
-              <a:t>구조 사용</a:t>
-            </a:r>
-            <a:endParaRPr lang="en-US" altLang="ko-KR" dirty="0"/>
-          </a:p>
-          <a:p>
-            <a:pPr marL="742950" lvl="1" indent="-285750">
+              <a:rPr lang="ko-KR" altLang="en-US" dirty="0"/>
+              <a:t>깊은 층에서 </a:t>
+            </a:r>
+            <a:r>
+              <a:rPr lang="ko-KR" altLang="en-US" dirty="0" err="1"/>
+              <a:t>낮은층</a:t>
+            </a:r>
+            <a:r>
+              <a:rPr lang="ko-KR" altLang="en-US" dirty="0"/>
+              <a:t> 만큼의 정확도가 </a:t>
+            </a:r>
+            <a:r>
+              <a:rPr lang="ko-KR" altLang="en-US" dirty="0" err="1"/>
+              <a:t>나올줄</a:t>
+            </a:r>
+            <a:r>
+              <a:rPr lang="ko-KR" altLang="en-US" dirty="0"/>
+              <a:t> 알았는데 더 좋아짐</a:t>
+            </a:r>
+            <a:r>
+              <a:rPr lang="en-US" altLang="ko-KR" dirty="0"/>
+              <a:t>.</a:t>
+            </a:r>
+          </a:p>
+          <a:p>
+            <a:pPr marL="285750" indent="-285750">
               <a:buFont typeface="Arial" panose="020B0604020202020204" pitchFamily="34" charset="0"/>
               <a:buChar char="•"/>
             </a:pPr>
             <a:r>
               <a:rPr lang="ko-KR" altLang="en-US" dirty="0"/>
-              <a:t>기존 </a:t>
-            </a:r>
-            <a:r>
-              <a:rPr lang="en-US" altLang="ko-KR" dirty="0"/>
-              <a:t>block</a:t>
-            </a:r>
-            <a:r>
-              <a:rPr lang="ko-KR" altLang="en-US" dirty="0"/>
-              <a:t> 처럼 </a:t>
-            </a:r>
-            <a:r>
-              <a:rPr lang="en-US" altLang="ko-KR" dirty="0"/>
-              <a:t>3x3</a:t>
-            </a:r>
-            <a:r>
-              <a:rPr lang="ko-KR" altLang="en-US" dirty="0"/>
-              <a:t>만 사용하면 파라미터 수 </a:t>
-            </a:r>
-            <a:r>
-              <a:rPr lang="ko-KR" altLang="en-US" dirty="0" err="1"/>
-              <a:t>많아짐</a:t>
-            </a:r>
-            <a:endParaRPr lang="en-US" altLang="ko-KR" dirty="0"/>
-          </a:p>
-          <a:p>
-            <a:pPr marL="742950" lvl="1" indent="-285750">
-              <a:buFont typeface="Arial" panose="020B0604020202020204" pitchFamily="34" charset="0"/>
-              <a:buChar char="•"/>
-            </a:pPr>
-            <a:r>
-              <a:rPr lang="en-US" altLang="ko-KR" dirty="0"/>
-              <a:t>1x1</a:t>
-            </a:r>
-            <a:r>
-              <a:rPr lang="ko-KR" altLang="en-US" dirty="0"/>
-              <a:t>로 채널 수 줄인 다음 </a:t>
-            </a:r>
-            <a:r>
-              <a:rPr lang="en-US" altLang="ko-KR" dirty="0"/>
-              <a:t>3x3 </a:t>
-            </a:r>
-            <a:r>
-              <a:rPr lang="ko-KR" altLang="en-US" dirty="0"/>
-              <a:t>통과시키고 다시 </a:t>
-            </a:r>
-            <a:r>
-              <a:rPr lang="en-US" altLang="ko-KR" dirty="0"/>
-              <a:t>1x1 </a:t>
-            </a:r>
-            <a:r>
-              <a:rPr lang="ko-KR" altLang="en-US" dirty="0" err="1"/>
-              <a:t>채널수</a:t>
-            </a:r>
-            <a:r>
-              <a:rPr lang="ko-KR" altLang="en-US" dirty="0"/>
-              <a:t> 키움</a:t>
-            </a:r>
-            <a:br>
-              <a:rPr lang="en-US" altLang="ko-KR" dirty="0"/>
-            </a:br>
-            <a:r>
-              <a:rPr lang="en-US" altLang="ko-KR" dirty="0"/>
-              <a:t>(1x1</a:t>
-            </a:r>
-            <a:r>
-              <a:rPr lang="ko-KR" altLang="en-US" dirty="0"/>
-              <a:t>로 채널 수 조절</a:t>
-            </a:r>
-            <a:r>
-              <a:rPr lang="en-US" altLang="ko-KR" dirty="0"/>
-              <a:t>, 3x3</a:t>
-            </a:r>
-            <a:r>
-              <a:rPr lang="ko-KR" altLang="en-US" dirty="0"/>
-              <a:t>으로 공간 정보를 보도록</a:t>
-            </a:r>
-            <a:r>
-              <a:rPr lang="en-US" altLang="ko-KR" dirty="0"/>
-              <a:t>)</a:t>
-            </a:r>
-          </a:p>
-          <a:p>
-            <a:pPr marL="742950" lvl="1" indent="-285750">
-              <a:buFont typeface="Arial" panose="020B0604020202020204" pitchFamily="34" charset="0"/>
-              <a:buChar char="•"/>
-            </a:pPr>
-            <a:r>
-              <a:rPr lang="en-US" altLang="ko-KR" dirty="0"/>
-              <a:t>256 -&gt; 64 -&gt; 256 </a:t>
-            </a:r>
-          </a:p>
-        </p:txBody>
-      </p:sp>
-      <mc:AlternateContent xmlns:mc="http://schemas.openxmlformats.org/markup-compatibility/2006">
-        <mc:Choice xmlns:p14="http://schemas.microsoft.com/office/powerpoint/2010/main" Requires="p14">
+              <a:t>왜인지는 모르겠음</a:t>
+            </a:r>
+            <a:r>
+              <a:rPr lang="en-US" altLang="ko-KR" dirty="0"/>
+              <a:t>!</a:t>
+            </a:r>
+          </a:p>
+        </p:txBody>
+      </p:sp>
+      <mc:AlternateContent xmlns:mc="http://schemas.openxmlformats.org/markup-compatibility/2006" xmlns:p14="http://schemas.microsoft.com/office/powerpoint/2010/main">
+        <mc:Choice Requires="p14">
           <p:contentPart p14:bwMode="auto" r:id="rId3">
             <p14:nvContentPartPr>
               <p14:cNvPr id="30" name="잉크 29">
@@ -11737,7 +12398,7 @@
             </p14:xfrm>
           </p:contentPart>
         </mc:Choice>
-        <mc:Fallback>
+        <mc:Fallback xmlns="">
           <p:pic>
             <p:nvPicPr>
               <p:cNvPr id="30" name="잉크 29">
@@ -11790,7 +12451,7 @@
         </p:blipFill>
         <p:spPr>
           <a:xfrm>
-            <a:off x="881375" y="3026092"/>
+            <a:off x="1163052" y="2483667"/>
             <a:ext cx="8954750" cy="2572109"/>
           </a:xfrm>
           <a:prstGeom prst="rect">
@@ -12027,7 +12688,7 @@
         <p:spPr>
           <a:xfrm>
             <a:off x="2322695" y="908229"/>
-            <a:ext cx="8326548" cy="4985980"/>
+            <a:ext cx="8326548" cy="1723549"/>
           </a:xfrm>
           <a:prstGeom prst="rect">
             <a:avLst/>
@@ -12047,7 +12708,7 @@
             <a:endParaRPr lang="en-US" altLang="ko-KR" sz="2400" b="1" dirty="0"/>
           </a:p>
           <a:p>
-            <a:endParaRPr lang="en-US" altLang="ko-KR" sz="2400" b="1" dirty="0"/>
+            <a:endParaRPr lang="en-US" altLang="ko-KR" sz="1000" b="1" dirty="0"/>
           </a:p>
           <a:p>
             <a:pPr marL="342900" indent="-342900">
@@ -12055,7 +12716,7 @@
             </a:pPr>
             <a:r>
               <a:rPr lang="ko-KR" altLang="en-US" dirty="0"/>
-              <a:t>데이터의 효율적인 표현을 학습하는 인공신경망 모델</a:t>
+              <a:t>데이터의 중요한 특성을 추출하고</a:t>
             </a:r>
             <a:endParaRPr lang="en-US" altLang="ko-KR" dirty="0"/>
           </a:p>
@@ -12065,162 +12726,81 @@
             </a:pPr>
             <a:r>
               <a:rPr lang="ko-KR" altLang="en-US" dirty="0"/>
-              <a:t>데이터의 중요한 특성을 추출하고</a:t>
+              <a:t>이를 바탕으로 데이터를 압축한 후 다시 복원하는 단계를 거침</a:t>
             </a:r>
             <a:endParaRPr lang="en-US" altLang="ko-KR" dirty="0"/>
           </a:p>
           <a:p>
-            <a:pPr marL="342900" indent="-342900">
-              <a:buAutoNum type="arabicPeriod"/>
+            <a:pPr marL="285750" indent="-285750">
+              <a:buFontTx/>
+              <a:buChar char="-"/>
             </a:pPr>
             <a:r>
               <a:rPr lang="ko-KR" altLang="en-US" dirty="0"/>
-              <a:t>이를 바탕으로 데이터를 압축한 후 다시 복원하는 단계를 거침</a:t>
+              <a:t>데이터의 효율적인 표현을 학습하는 인공신경망 모델</a:t>
             </a:r>
             <a:endParaRPr lang="en-US" altLang="ko-KR" dirty="0"/>
           </a:p>
           <a:p>
-            <a:pPr marL="342900" indent="-342900">
-              <a:buAutoNum type="arabicPeriod"/>
+            <a:pPr marL="285750" indent="-285750">
+              <a:buFontTx/>
+              <a:buChar char="-"/>
             </a:pPr>
             <a:r>
-              <a:rPr lang="en-US" altLang="ko-KR" dirty="0"/>
-              <a:t>Encoder</a:t>
-            </a:r>
-            <a:r>
-              <a:rPr lang="ko-KR" altLang="en-US" dirty="0"/>
-              <a:t>부분 더 작은 차원으로 압축</a:t>
-            </a:r>
-            <a:r>
-              <a:rPr lang="en-US" altLang="ko-KR" dirty="0"/>
-              <a:t>(</a:t>
-            </a:r>
-            <a:r>
-              <a:rPr lang="ko-KR" altLang="en-US" dirty="0"/>
-              <a:t>데이터의 중요한 특성을 얼마나 잘 잡아내느냐</a:t>
-            </a:r>
-            <a:r>
-              <a:rPr lang="en-US" altLang="ko-KR" dirty="0"/>
-              <a:t>)</a:t>
-            </a:r>
-          </a:p>
-          <a:p>
-            <a:pPr marL="342900" indent="-342900">
-              <a:buAutoNum type="arabicPeriod"/>
-            </a:pPr>
-            <a:r>
-              <a:rPr lang="en-US" altLang="ko-KR" dirty="0"/>
-              <a:t>Decoder </a:t>
-            </a:r>
-            <a:r>
-              <a:rPr lang="ko-KR" altLang="en-US" dirty="0"/>
-              <a:t>완벽하게 복원은 아니지만 원본에 가깝게 복원함</a:t>
+              <a:rPr lang="ko-KR" altLang="en-US" dirty="0"/>
+              <a:t>입력을 그대로 복원하도록 학습하는 신경망</a:t>
             </a:r>
             <a:endParaRPr lang="en-US" altLang="ko-KR" dirty="0"/>
           </a:p>
-          <a:p>
-            <a:pPr marL="342900" indent="-342900">
-              <a:buAutoNum type="arabicPeriod"/>
-            </a:pPr>
-            <a:r>
-              <a:rPr lang="ko-KR" altLang="en-US" dirty="0" err="1"/>
-              <a:t>셀프지도</a:t>
-            </a:r>
-            <a:r>
-              <a:rPr lang="ko-KR" altLang="en-US" dirty="0"/>
-              <a:t> 학습</a:t>
-            </a:r>
-            <a:br>
-              <a:rPr lang="en-US" altLang="ko-KR" dirty="0"/>
-            </a:br>
-            <a:r>
-              <a:rPr lang="ko-KR" altLang="en-US" dirty="0" err="1"/>
-              <a:t>출력값이</a:t>
-            </a:r>
-            <a:r>
-              <a:rPr lang="ko-KR" altLang="en-US" dirty="0"/>
-              <a:t> 주어지지 않으며 주어진 데이터의 특성과 분포를 기반으로 설정됨</a:t>
-            </a:r>
-            <a:r>
-              <a:rPr lang="en-US" altLang="ko-KR" dirty="0"/>
-              <a:t>, </a:t>
-            </a:r>
-            <a:r>
-              <a:rPr lang="ko-KR" altLang="en-US" dirty="0"/>
-              <a:t>원본과 복원 간의 차이를 줄이면서 학습</a:t>
-            </a:r>
-            <a:endParaRPr lang="en-US" altLang="ko-KR" dirty="0"/>
-          </a:p>
-          <a:p>
-            <a:pPr marL="342900" indent="-342900">
-              <a:buAutoNum type="arabicPeriod"/>
-            </a:pPr>
-            <a:r>
-              <a:rPr lang="ko-KR" altLang="en-US" dirty="0"/>
-              <a:t>차원축소 </a:t>
-            </a:r>
-            <a:r>
-              <a:rPr lang="en-US" altLang="ko-KR" dirty="0"/>
-              <a:t>: </a:t>
-            </a:r>
-            <a:r>
-              <a:rPr lang="ko-KR" altLang="en-US" dirty="0"/>
-              <a:t>데이터의 특성을 줄임</a:t>
-            </a:r>
-            <a:r>
-              <a:rPr lang="en-US" altLang="ko-KR" dirty="0"/>
-              <a:t>, </a:t>
-            </a:r>
-            <a:r>
-              <a:rPr lang="ko-KR" altLang="en-US" dirty="0"/>
-              <a:t>계상 높이고 노이즈 줄이고 데이터를 더 잘 이해함</a:t>
-            </a:r>
-            <a:r>
-              <a:rPr lang="en-US" altLang="ko-KR" dirty="0"/>
-              <a:t>, </a:t>
-            </a:r>
-            <a:r>
-              <a:rPr lang="ko-KR" altLang="en-US" dirty="0"/>
-              <a:t>불필요한 내용 없애기</a:t>
-            </a:r>
-            <a:endParaRPr lang="en-US" altLang="ko-KR" dirty="0"/>
-          </a:p>
-          <a:p>
-            <a:pPr marL="342900" indent="-342900">
-              <a:buAutoNum type="arabicPeriod"/>
-            </a:pPr>
-            <a:r>
-              <a:rPr lang="ko-KR" altLang="en-US" dirty="0"/>
-              <a:t>제한된 크기의 잠재 공간을 사용하여 최대한 근접하게 생성해내는 학습을 하는 과정에서 원본 데이터가 갖는 중요한 특성을 잡아냄</a:t>
-            </a:r>
-            <a:endParaRPr lang="en-US" altLang="ko-KR" dirty="0"/>
-          </a:p>
-          <a:p>
-            <a:pPr marL="342900" indent="-342900">
-              <a:buAutoNum type="arabicPeriod"/>
-            </a:pPr>
-            <a:r>
-              <a:rPr lang="ko-KR" altLang="en-US" dirty="0"/>
-              <a:t>추론 시 이미지를 </a:t>
-            </a:r>
-            <a:r>
-              <a:rPr lang="en-US" altLang="ko-KR" dirty="0"/>
-              <a:t>1</a:t>
-            </a:r>
-            <a:r>
-              <a:rPr lang="ko-KR" altLang="en-US" dirty="0"/>
-              <a:t>회 분석한다</a:t>
-            </a:r>
-            <a:endParaRPr lang="en-US" altLang="ko-KR" dirty="0"/>
-          </a:p>
-          <a:p>
-            <a:pPr marL="342900" indent="-342900">
-              <a:buAutoNum type="arabicPeriod"/>
-            </a:pPr>
-            <a:endParaRPr lang="ko-KR" altLang="en-US" dirty="0"/>
-          </a:p>
-        </p:txBody>
-      </p:sp>
+        </p:txBody>
+      </p:sp>
+      <p:pic>
+        <p:nvPicPr>
+          <p:cNvPr id="1026" name="Picture 2" descr="Autoencoder architecture">
+            <a:extLst>
+              <a:ext uri="{FF2B5EF4-FFF2-40B4-BE49-F238E27FC236}">
+                <a16:creationId xmlns:a16="http://schemas.microsoft.com/office/drawing/2014/main" id="{9D98CCD9-AC2C-2A5E-FB9F-B9A29D7B7FBE}"/>
+              </a:ext>
+            </a:extLst>
+          </p:cNvPr>
+          <p:cNvPicPr>
+            <a:picLocks noChangeAspect="1" noChangeArrowheads="1"/>
+          </p:cNvPicPr>
+          <p:nvPr/>
+        </p:nvPicPr>
+        <p:blipFill>
+          <a:blip r:embed="rId2">
+            <a:extLst>
+              <a:ext uri="{28A0092B-C50C-407E-A947-70E740481C1C}">
+                <a14:useLocalDpi xmlns:a14="http://schemas.microsoft.com/office/drawing/2010/main" val="0"/>
+              </a:ext>
+            </a:extLst>
+          </a:blip>
+          <a:srcRect/>
+          <a:stretch>
+            <a:fillRect/>
+          </a:stretch>
+        </p:blipFill>
+        <p:spPr bwMode="auto">
+          <a:xfrm>
+            <a:off x="2027420" y="2583196"/>
+            <a:ext cx="7505747" cy="4002088"/>
+          </a:xfrm>
+          <a:prstGeom prst="rect">
+            <a:avLst/>
+          </a:prstGeom>
+          <a:noFill/>
+          <a:extLst>
+            <a:ext uri="{909E8E84-426E-40DD-AFC4-6F175D3DCCD1}">
+              <a14:hiddenFill xmlns:a14="http://schemas.microsoft.com/office/drawing/2010/main">
+                <a:solidFill>
+                  <a:srgbClr val="FFFFFF"/>
+                </a:solidFill>
+              </a14:hiddenFill>
+            </a:ext>
+          </a:extLst>
+        </p:spPr>
+      </p:pic>
     </p:spTree>
     <p:extLst>
       <p:ext uri="{BB962C8B-B14F-4D97-AF65-F5344CB8AC3E}">

--- a/06week/ResNet-AutoEncoder.pptx
+++ b/06week/ResNet-AutoEncoder.pptx
@@ -5,7 +5,7 @@
     <p:sldMasterId id="2147483696" r:id="rId1"/>
   </p:sldMasterIdLst>
   <p:notesMasterIdLst>
-    <p:notesMasterId r:id="rId21"/>
+    <p:notesMasterId r:id="rId22"/>
   </p:notesMasterIdLst>
   <p:sldIdLst>
     <p:sldId id="256" r:id="rId2"/>
@@ -21,12 +21,13 @@
     <p:sldId id="290" r:id="rId12"/>
     <p:sldId id="292" r:id="rId13"/>
     <p:sldId id="279" r:id="rId14"/>
-    <p:sldId id="275" r:id="rId15"/>
-    <p:sldId id="276" r:id="rId16"/>
-    <p:sldId id="277" r:id="rId17"/>
-    <p:sldId id="280" r:id="rId18"/>
-    <p:sldId id="281" r:id="rId19"/>
-    <p:sldId id="282" r:id="rId20"/>
+    <p:sldId id="293" r:id="rId15"/>
+    <p:sldId id="275" r:id="rId16"/>
+    <p:sldId id="276" r:id="rId17"/>
+    <p:sldId id="277" r:id="rId18"/>
+    <p:sldId id="280" r:id="rId19"/>
+    <p:sldId id="281" r:id="rId20"/>
+    <p:sldId id="282" r:id="rId21"/>
   </p:sldIdLst>
   <p:sldSz cx="12192000" cy="6858000"/>
   <p:notesSz cx="6858000" cy="9144000"/>
@@ -5386,7 +5387,7 @@
         </p:nvSpPr>
         <p:spPr>
           <a:xfrm>
-            <a:off x="1930790" y="1870881"/>
+            <a:off x="2011104" y="1473058"/>
             <a:ext cx="8326548" cy="1454244"/>
           </a:xfrm>
           <a:prstGeom prst="rect">
@@ -5449,6 +5450,57 @@
               <a:buAutoNum type="arabicPeriod"/>
             </a:pPr>
             <a:endParaRPr lang="ko-KR" altLang="en-US" dirty="0"/>
+          </a:p>
+        </p:txBody>
+      </p:sp>
+      <p:sp>
+        <p:nvSpPr>
+          <p:cNvPr id="2" name="TextBox 1">
+            <a:extLst>
+              <a:ext uri="{FF2B5EF4-FFF2-40B4-BE49-F238E27FC236}">
+                <a16:creationId xmlns:a16="http://schemas.microsoft.com/office/drawing/2014/main" id="{2C407480-6CB9-6B6A-F741-0A1BA0D8B80D}"/>
+              </a:ext>
+            </a:extLst>
+          </p:cNvPr>
+          <p:cNvSpPr txBox="1"/>
+          <p:nvPr/>
+        </p:nvSpPr>
+        <p:spPr>
+          <a:xfrm>
+            <a:off x="1790700" y="3285092"/>
+            <a:ext cx="6581775" cy="923330"/>
+          </a:xfrm>
+          <a:prstGeom prst="rect">
+            <a:avLst/>
+          </a:prstGeom>
+          <a:noFill/>
+        </p:spPr>
+        <p:txBody>
+          <a:bodyPr wrap="square" rtlCol="0">
+            <a:spAutoFit/>
+          </a:bodyPr>
+          <a:lstStyle/>
+          <a:p>
+            <a:r>
+              <a:rPr lang="en-US" altLang="ko-KR" dirty="0" err="1"/>
+              <a:t>AutoEncoder</a:t>
+            </a:r>
+            <a:r>
+              <a:rPr lang="en-US" altLang="ko-KR" dirty="0"/>
+              <a:t> : 784 -&gt; 256 -&gt; 64 -&gt; 256 -&gt; 784</a:t>
+            </a:r>
+          </a:p>
+          <a:p>
+            <a:r>
+              <a:rPr lang="en-US" altLang="ko-KR" dirty="0"/>
+              <a:t>Classifier : 784 -&gt; 256 -&gt; 64 -&gt; 10</a:t>
+            </a:r>
+          </a:p>
+          <a:p>
+            <a:r>
+              <a:rPr lang="ko-KR" altLang="en-US" dirty="0"/>
+              <a:t>앞부분 그대로 사용</a:t>
+            </a:r>
           </a:p>
         </p:txBody>
       </p:sp>
@@ -5680,8 +5732,8 @@
         </p:nvSpPr>
         <p:spPr>
           <a:xfrm>
-            <a:off x="2322695" y="908229"/>
-            <a:ext cx="8326548" cy="2769989"/>
+            <a:off x="2322694" y="879864"/>
+            <a:ext cx="8326548" cy="3046988"/>
           </a:xfrm>
           <a:prstGeom prst="rect">
             <a:avLst/>
@@ -5707,6 +5759,39 @@
             <a:endParaRPr lang="en-US" altLang="ko-KR" sz="2400" b="1" dirty="0"/>
           </a:p>
           <a:p>
+            <a:r>
+              <a:rPr lang="ko-KR" altLang="en-US" dirty="0">
+                <a:solidFill>
+                  <a:srgbClr val="212529"/>
+                </a:solidFill>
+                <a:latin typeface="NanumGothicCoding" panose="020D0009000000000000" pitchFamily="49" charset="-127"/>
+                <a:ea typeface="NanumGothicCoding" panose="020D0009000000000000" pitchFamily="49" charset="-127"/>
+              </a:rPr>
+              <a:t>랜덤 노이즈로 </a:t>
+            </a:r>
+            <a:r>
+              <a:rPr lang="ko-KR" altLang="en-US" dirty="0" err="1">
+                <a:solidFill>
+                  <a:srgbClr val="212529"/>
+                </a:solidFill>
+                <a:latin typeface="NanumGothicCoding" panose="020D0009000000000000" pitchFamily="49" charset="-127"/>
+                <a:ea typeface="NanumGothicCoding" panose="020D0009000000000000" pitchFamily="49" charset="-127"/>
+              </a:rPr>
+              <a:t>부터</a:t>
+            </a:r>
+            <a:r>
+              <a:rPr lang="ko-KR" altLang="en-US" dirty="0">
+                <a:solidFill>
+                  <a:srgbClr val="212529"/>
+                </a:solidFill>
+                <a:latin typeface="NanumGothicCoding" panose="020D0009000000000000" pitchFamily="49" charset="-127"/>
+                <a:ea typeface="NanumGothicCoding" panose="020D0009000000000000" pitchFamily="49" charset="-127"/>
+              </a:rPr>
+              <a:t> 원하는 영상을 얻을 수 없는 지에 대한 의문에서 시작</a:t>
+            </a:r>
+            <a:endParaRPr lang="en-US" altLang="ko-KR" dirty="0"/>
+          </a:p>
+          <a:p>
             <a:pPr marL="342900" indent="-342900">
               <a:buAutoNum type="arabicPeriod"/>
             </a:pPr>
@@ -5803,6 +5888,53 @@
           </a:p>
         </p:txBody>
       </p:sp>
+      <p:pic>
+        <p:nvPicPr>
+          <p:cNvPr id="2050" name="Picture 2" descr="VAE(Variational AutoEncoder)">
+            <a:extLst>
+              <a:ext uri="{FF2B5EF4-FFF2-40B4-BE49-F238E27FC236}">
+                <a16:creationId xmlns:a16="http://schemas.microsoft.com/office/drawing/2014/main" id="{8D3A1531-A2AF-76AA-48EE-D0213140134E}"/>
+              </a:ext>
+            </a:extLst>
+          </p:cNvPr>
+          <p:cNvPicPr>
+            <a:picLocks noChangeAspect="1" noChangeArrowheads="1"/>
+          </p:cNvPicPr>
+          <p:nvPr/>
+        </p:nvPicPr>
+        <p:blipFill>
+          <a:blip r:embed="rId2">
+            <a:extLst>
+              <a:ext uri="{28A0092B-C50C-407E-A947-70E740481C1C}">
+                <a14:useLocalDpi xmlns:a14="http://schemas.microsoft.com/office/drawing/2010/main" val="0"/>
+              </a:ext>
+            </a:extLst>
+          </a:blip>
+          <a:srcRect/>
+          <a:stretch>
+            <a:fillRect/>
+          </a:stretch>
+        </p:blipFill>
+        <p:spPr bwMode="auto">
+          <a:xfrm>
+            <a:off x="2224088" y="3318209"/>
+            <a:ext cx="7172325" cy="3267075"/>
+          </a:xfrm>
+          <a:prstGeom prst="rect">
+            <a:avLst/>
+          </a:prstGeom>
+          <a:noFill/>
+          <a:extLst>
+            <a:ext uri="{909E8E84-426E-40DD-AFC4-6F175D3DCCD1}">
+              <a14:hiddenFill xmlns:a14="http://schemas.microsoft.com/office/drawing/2010/main">
+                <a:solidFill>
+                  <a:srgbClr val="FFFFFF"/>
+                </a:solidFill>
+              </a14:hiddenFill>
+            </a:ext>
+          </a:extLst>
+        </p:spPr>
+      </p:pic>
     </p:spTree>
     <p:extLst>
       <p:ext uri="{BB962C8B-B14F-4D97-AF65-F5344CB8AC3E}">
@@ -5817,6 +5949,340 @@
 </file>
 
 <file path=ppt/slides/slide14.xml><?xml version="1.0" encoding="utf-8"?>
+<p:sld xmlns:a="http://schemas.openxmlformats.org/drawingml/2006/main" xmlns:r="http://schemas.openxmlformats.org/officeDocument/2006/relationships" xmlns:p="http://schemas.openxmlformats.org/presentationml/2006/main">
+  <p:cSld>
+    <p:spTree>
+      <p:nvGrpSpPr>
+        <p:cNvPr id="1" name="">
+          <a:extLst>
+            <a:ext uri="{FF2B5EF4-FFF2-40B4-BE49-F238E27FC236}">
+              <a16:creationId xmlns:a16="http://schemas.microsoft.com/office/drawing/2014/main" id="{14D40A66-A258-540B-C3CC-F54EF89EF4FF}"/>
+            </a:ext>
+          </a:extLst>
+        </p:cNvPr>
+        <p:cNvGrpSpPr/>
+        <p:nvPr/>
+      </p:nvGrpSpPr>
+      <p:grpSpPr>
+        <a:xfrm>
+          <a:off x="0" y="0"/>
+          <a:ext cx="0" cy="0"/>
+          <a:chOff x="0" y="0"/>
+          <a:chExt cx="0" cy="0"/>
+        </a:xfrm>
+      </p:grpSpPr>
+      <p:sp>
+        <p:nvSpPr>
+          <p:cNvPr id="6" name="TextBox 5">
+            <a:extLst>
+              <a:ext uri="{FF2B5EF4-FFF2-40B4-BE49-F238E27FC236}">
+                <a16:creationId xmlns:a16="http://schemas.microsoft.com/office/drawing/2014/main" id="{58575AA2-F12D-3863-1F89-6009C88FAA99}"/>
+              </a:ext>
+            </a:extLst>
+          </p:cNvPr>
+          <p:cNvSpPr txBox="1"/>
+          <p:nvPr/>
+        </p:nvSpPr>
+        <p:spPr>
+          <a:xfrm>
+            <a:off x="144378" y="272716"/>
+            <a:ext cx="736997" cy="338554"/>
+          </a:xfrm>
+          <a:prstGeom prst="rect">
+            <a:avLst/>
+          </a:prstGeom>
+          <a:noFill/>
+        </p:spPr>
+        <p:txBody>
+          <a:bodyPr wrap="none" rtlCol="0">
+            <a:spAutoFit/>
+          </a:bodyPr>
+          <a:lstStyle/>
+          <a:p>
+            <a:r>
+              <a:rPr lang="en-US" altLang="ko-KR" sz="1600" dirty="0">
+                <a:solidFill>
+                  <a:srgbClr val="00B0F0"/>
+                </a:solidFill>
+              </a:rPr>
+              <a:t>Part 0</a:t>
+            </a:r>
+            <a:endParaRPr lang="ko-KR" altLang="en-US" sz="1600" dirty="0">
+              <a:solidFill>
+                <a:srgbClr val="00B0F0"/>
+              </a:solidFill>
+            </a:endParaRPr>
+          </a:p>
+        </p:txBody>
+      </p:sp>
+      <p:sp>
+        <p:nvSpPr>
+          <p:cNvPr id="7" name="TextBox 6">
+            <a:extLst>
+              <a:ext uri="{FF2B5EF4-FFF2-40B4-BE49-F238E27FC236}">
+                <a16:creationId xmlns:a16="http://schemas.microsoft.com/office/drawing/2014/main" id="{58C0BEEE-8FFF-7096-29F6-87895197CDBA}"/>
+              </a:ext>
+            </a:extLst>
+          </p:cNvPr>
+          <p:cNvSpPr txBox="1"/>
+          <p:nvPr/>
+        </p:nvSpPr>
+        <p:spPr>
+          <a:xfrm>
+            <a:off x="1163052" y="272716"/>
+            <a:ext cx="2627642" cy="523220"/>
+          </a:xfrm>
+          <a:prstGeom prst="rect">
+            <a:avLst/>
+          </a:prstGeom>
+          <a:noFill/>
+        </p:spPr>
+        <p:txBody>
+          <a:bodyPr wrap="none" rtlCol="0">
+            <a:spAutoFit/>
+          </a:bodyPr>
+          <a:lstStyle/>
+          <a:p>
+            <a:r>
+              <a:rPr lang="ko-KR" altLang="en-US" sz="2800" b="1" dirty="0" err="1">
+                <a:solidFill>
+                  <a:srgbClr val="00B0F0"/>
+                </a:solidFill>
+              </a:rPr>
+              <a:t>오토인코더</a:t>
+            </a:r>
+            <a:r>
+              <a:rPr lang="ko-KR" altLang="en-US" sz="2800" b="1" dirty="0">
+                <a:solidFill>
+                  <a:srgbClr val="00B0F0"/>
+                </a:solidFill>
+              </a:rPr>
+              <a:t> 란</a:t>
+            </a:r>
+            <a:r>
+              <a:rPr lang="en-US" altLang="ko-KR" sz="2800" b="1" dirty="0">
+                <a:solidFill>
+                  <a:srgbClr val="00B0F0"/>
+                </a:solidFill>
+              </a:rPr>
+              <a:t>?</a:t>
+            </a:r>
+            <a:endParaRPr lang="ko-KR" altLang="en-US" sz="2800" b="1" dirty="0">
+              <a:solidFill>
+                <a:srgbClr val="00B0F0"/>
+              </a:solidFill>
+            </a:endParaRPr>
+          </a:p>
+        </p:txBody>
+      </p:sp>
+      <p:cxnSp>
+        <p:nvCxnSpPr>
+          <p:cNvPr id="9" name="직선 연결선 8">
+            <a:extLst>
+              <a:ext uri="{FF2B5EF4-FFF2-40B4-BE49-F238E27FC236}">
+                <a16:creationId xmlns:a16="http://schemas.microsoft.com/office/drawing/2014/main" id="{E20DABDC-6CED-DE15-AEF0-7F517AEFFE84}"/>
+              </a:ext>
+            </a:extLst>
+          </p:cNvPr>
+          <p:cNvCxnSpPr/>
+          <p:nvPr/>
+        </p:nvCxnSpPr>
+        <p:spPr>
+          <a:xfrm>
+            <a:off x="144378" y="160422"/>
+            <a:ext cx="12060000" cy="0"/>
+          </a:xfrm>
+          <a:prstGeom prst="line">
+            <a:avLst/>
+          </a:prstGeom>
+          <a:ln w="57150"/>
+        </p:spPr>
+        <p:style>
+          <a:lnRef idx="1">
+            <a:schemeClr val="accent4"/>
+          </a:lnRef>
+          <a:fillRef idx="0">
+            <a:schemeClr val="accent4"/>
+          </a:fillRef>
+          <a:effectRef idx="0">
+            <a:schemeClr val="accent4"/>
+          </a:effectRef>
+          <a:fontRef idx="minor">
+            <a:schemeClr val="tx1"/>
+          </a:fontRef>
+        </p:style>
+      </p:cxnSp>
+      <p:cxnSp>
+        <p:nvCxnSpPr>
+          <p:cNvPr id="11" name="직선 연결선 10">
+            <a:extLst>
+              <a:ext uri="{FF2B5EF4-FFF2-40B4-BE49-F238E27FC236}">
+                <a16:creationId xmlns:a16="http://schemas.microsoft.com/office/drawing/2014/main" id="{F13632F8-124D-3BE8-A09C-B4D5ABDC225D}"/>
+              </a:ext>
+            </a:extLst>
+          </p:cNvPr>
+          <p:cNvCxnSpPr/>
+          <p:nvPr/>
+        </p:nvCxnSpPr>
+        <p:spPr>
+          <a:xfrm>
+            <a:off x="64064" y="6697578"/>
+            <a:ext cx="12060000" cy="0"/>
+          </a:xfrm>
+          <a:prstGeom prst="line">
+            <a:avLst/>
+          </a:prstGeom>
+          <a:ln/>
+        </p:spPr>
+        <p:style>
+          <a:lnRef idx="1">
+            <a:schemeClr val="accent4"/>
+          </a:lnRef>
+          <a:fillRef idx="0">
+            <a:schemeClr val="accent4"/>
+          </a:fillRef>
+          <a:effectRef idx="0">
+            <a:schemeClr val="accent4"/>
+          </a:effectRef>
+          <a:fontRef idx="minor">
+            <a:schemeClr val="tx1"/>
+          </a:fontRef>
+        </p:style>
+      </p:cxnSp>
+      <p:sp>
+        <p:nvSpPr>
+          <p:cNvPr id="4" name="TextBox 3">
+            <a:extLst>
+              <a:ext uri="{FF2B5EF4-FFF2-40B4-BE49-F238E27FC236}">
+                <a16:creationId xmlns:a16="http://schemas.microsoft.com/office/drawing/2014/main" id="{A832D142-233C-F15F-BE3A-5761C2F33575}"/>
+              </a:ext>
+            </a:extLst>
+          </p:cNvPr>
+          <p:cNvSpPr txBox="1"/>
+          <p:nvPr/>
+        </p:nvSpPr>
+        <p:spPr>
+          <a:xfrm>
+            <a:off x="1743075" y="879864"/>
+            <a:ext cx="8906167" cy="1938992"/>
+          </a:xfrm>
+          <a:prstGeom prst="rect">
+            <a:avLst/>
+          </a:prstGeom>
+          <a:noFill/>
+        </p:spPr>
+        <p:txBody>
+          <a:bodyPr wrap="square" rtlCol="0">
+            <a:spAutoFit/>
+          </a:bodyPr>
+          <a:lstStyle/>
+          <a:p>
+            <a:r>
+              <a:rPr lang="ko-KR" altLang="en-US" sz="2400" b="1" dirty="0" err="1"/>
+              <a:t>변분오토인코드</a:t>
+            </a:r>
+            <a:r>
+              <a:rPr lang="en-US" altLang="ko-KR" sz="2400" b="1" dirty="0"/>
+              <a:t>(VAE)</a:t>
+            </a:r>
+          </a:p>
+          <a:p>
+            <a:endParaRPr lang="en-US" altLang="ko-KR" sz="2400" b="1" dirty="0"/>
+          </a:p>
+          <a:p>
+            <a:r>
+              <a:rPr lang="ko-KR" altLang="en-US" dirty="0"/>
+              <a:t>단순히 </a:t>
+            </a:r>
+            <a:r>
+              <a:rPr lang="ko-KR" altLang="en-US" dirty="0" err="1"/>
+              <a:t>입력값을</a:t>
+            </a:r>
+            <a:r>
+              <a:rPr lang="ko-KR" altLang="en-US" dirty="0"/>
+              <a:t> 재구성하는 </a:t>
+            </a:r>
+            <a:r>
+              <a:rPr lang="en-US" altLang="ko-KR" dirty="0"/>
+              <a:t>AE</a:t>
+            </a:r>
+            <a:r>
+              <a:rPr lang="ko-KR" altLang="en-US" dirty="0"/>
+              <a:t>에서 발전한 구조</a:t>
+            </a:r>
+            <a:endParaRPr lang="en-US" altLang="ko-KR" dirty="0"/>
+          </a:p>
+          <a:p>
+            <a:r>
+              <a:rPr lang="ko-KR" altLang="en-US" dirty="0"/>
+              <a:t>추출된 잠재 코드의 값을 하나의 숫자로 나타내는 것이 아니라</a:t>
+            </a:r>
+            <a:r>
+              <a:rPr lang="en-US" altLang="ko-KR" dirty="0"/>
+              <a:t>, </a:t>
+            </a:r>
+            <a:r>
+              <a:rPr lang="ko-KR" altLang="en-US" dirty="0" err="1"/>
+              <a:t>가우시안</a:t>
+            </a:r>
+            <a:r>
+              <a:rPr lang="ko-KR" altLang="en-US" dirty="0"/>
+              <a:t> 확률 분포에 기반한 확률 값으로 나타냄</a:t>
+            </a:r>
+            <a:endParaRPr lang="en-US" altLang="ko-KR" dirty="0"/>
+          </a:p>
+          <a:p>
+            <a:pPr marL="342900" indent="-342900">
+              <a:buAutoNum type="arabicPeriod"/>
+            </a:pPr>
+            <a:endParaRPr lang="en-US" altLang="ko-KR" dirty="0"/>
+          </a:p>
+        </p:txBody>
+      </p:sp>
+      <p:pic>
+        <p:nvPicPr>
+          <p:cNvPr id="5" name="그림 4">
+            <a:extLst>
+              <a:ext uri="{FF2B5EF4-FFF2-40B4-BE49-F238E27FC236}">
+                <a16:creationId xmlns:a16="http://schemas.microsoft.com/office/drawing/2014/main" id="{A88BA8D1-2AE3-2844-EA67-335CCAFBAEEA}"/>
+              </a:ext>
+            </a:extLst>
+          </p:cNvPr>
+          <p:cNvPicPr>
+            <a:picLocks noChangeAspect="1"/>
+          </p:cNvPicPr>
+          <p:nvPr/>
+        </p:nvPicPr>
+        <p:blipFill>
+          <a:blip r:embed="rId2"/>
+          <a:stretch>
+            <a:fillRect/>
+          </a:stretch>
+        </p:blipFill>
+        <p:spPr>
+          <a:xfrm>
+            <a:off x="2152180" y="2493357"/>
+            <a:ext cx="6725589" cy="3753374"/>
+          </a:xfrm>
+          <a:prstGeom prst="rect">
+            <a:avLst/>
+          </a:prstGeom>
+        </p:spPr>
+      </p:pic>
+    </p:spTree>
+    <p:extLst>
+      <p:ext uri="{BB962C8B-B14F-4D97-AF65-F5344CB8AC3E}">
+        <p14:creationId xmlns:p14="http://schemas.microsoft.com/office/powerpoint/2010/main" val="139433904"/>
+      </p:ext>
+    </p:extLst>
+  </p:cSld>
+  <p:clrMapOvr>
+    <a:masterClrMapping/>
+  </p:clrMapOvr>
+</p:sld>
+</file>
+
+<file path=ppt/slides/slide15.xml><?xml version="1.0" encoding="utf-8"?>
 <p:sld xmlns:a="http://schemas.openxmlformats.org/drawingml/2006/main" xmlns:r="http://schemas.openxmlformats.org/officeDocument/2006/relationships" xmlns:p="http://schemas.openxmlformats.org/presentationml/2006/main">
   <p:cSld>
     <p:spTree>
@@ -5978,7 +6444,7 @@
 </p:sld>
 </file>
 
-<file path=ppt/slides/slide15.xml><?xml version="1.0" encoding="utf-8"?>
+<file path=ppt/slides/slide16.xml><?xml version="1.0" encoding="utf-8"?>
 <p:sld xmlns:a="http://schemas.openxmlformats.org/drawingml/2006/main" xmlns:r="http://schemas.openxmlformats.org/officeDocument/2006/relationships" xmlns:p="http://schemas.openxmlformats.org/presentationml/2006/main">
   <p:cSld>
     <p:spTree>
@@ -6275,7 +6741,7 @@
 </p:sld>
 </file>
 
-<file path=ppt/slides/slide16.xml><?xml version="1.0" encoding="utf-8"?>
+<file path=ppt/slides/slide17.xml><?xml version="1.0" encoding="utf-8"?>
 <p:sld xmlns:a="http://schemas.openxmlformats.org/drawingml/2006/main" xmlns:r="http://schemas.openxmlformats.org/officeDocument/2006/relationships" xmlns:p="http://schemas.openxmlformats.org/presentationml/2006/main">
   <p:cSld>
     <p:spTree>
@@ -6885,7 +7351,7 @@
 </p:sld>
 </file>
 
-<file path=ppt/slides/slide17.xml><?xml version="1.0" encoding="utf-8"?>
+<file path=ppt/slides/slide18.xml><?xml version="1.0" encoding="utf-8"?>
 <p:sld xmlns:a="http://schemas.openxmlformats.org/drawingml/2006/main" xmlns:r="http://schemas.openxmlformats.org/officeDocument/2006/relationships" xmlns:p="http://schemas.openxmlformats.org/presentationml/2006/main">
   <p:cSld>
     <p:spTree>
@@ -7377,7 +7843,7 @@
 </p:sld>
 </file>
 
-<file path=ppt/slides/slide18.xml><?xml version="1.0" encoding="utf-8"?>
+<file path=ppt/slides/slide19.xml><?xml version="1.0" encoding="utf-8"?>
 <p:sld xmlns:a="http://schemas.openxmlformats.org/drawingml/2006/main" xmlns:r="http://schemas.openxmlformats.org/officeDocument/2006/relationships" xmlns:p="http://schemas.openxmlformats.org/presentationml/2006/main">
   <p:cSld>
     <p:spTree>
@@ -7813,447 +8279,6 @@
     <p:extLst>
       <p:ext uri="{BB962C8B-B14F-4D97-AF65-F5344CB8AC3E}">
         <p14:creationId xmlns:p14="http://schemas.microsoft.com/office/powerpoint/2010/main" val="1343105691"/>
-      </p:ext>
-    </p:extLst>
-  </p:cSld>
-  <p:clrMapOvr>
-    <a:masterClrMapping/>
-  </p:clrMapOvr>
-</p:sld>
-</file>
-
-<file path=ppt/slides/slide19.xml><?xml version="1.0" encoding="utf-8"?>
-<p:sld xmlns:a="http://schemas.openxmlformats.org/drawingml/2006/main" xmlns:r="http://schemas.openxmlformats.org/officeDocument/2006/relationships" xmlns:p="http://schemas.openxmlformats.org/presentationml/2006/main">
-  <p:cSld>
-    <p:spTree>
-      <p:nvGrpSpPr>
-        <p:cNvPr id="1" name="">
-          <a:extLst>
-            <a:ext uri="{FF2B5EF4-FFF2-40B4-BE49-F238E27FC236}">
-              <a16:creationId xmlns:a16="http://schemas.microsoft.com/office/drawing/2014/main" id="{EBD4D760-7E0D-577F-BD68-2610F64921AD}"/>
-            </a:ext>
-          </a:extLst>
-        </p:cNvPr>
-        <p:cNvGrpSpPr/>
-        <p:nvPr/>
-      </p:nvGrpSpPr>
-      <p:grpSpPr>
-        <a:xfrm>
-          <a:off x="0" y="0"/>
-          <a:ext cx="0" cy="0"/>
-          <a:chOff x="0" y="0"/>
-          <a:chExt cx="0" cy="0"/>
-        </a:xfrm>
-      </p:grpSpPr>
-      <p:sp>
-        <p:nvSpPr>
-          <p:cNvPr id="6" name="TextBox 5">
-            <a:extLst>
-              <a:ext uri="{FF2B5EF4-FFF2-40B4-BE49-F238E27FC236}">
-                <a16:creationId xmlns:a16="http://schemas.microsoft.com/office/drawing/2014/main" id="{7449639C-48BA-413F-0829-843509B3ED50}"/>
-              </a:ext>
-            </a:extLst>
-          </p:cNvPr>
-          <p:cNvSpPr txBox="1"/>
-          <p:nvPr/>
-        </p:nvSpPr>
-        <p:spPr>
-          <a:xfrm>
-            <a:off x="144378" y="272716"/>
-            <a:ext cx="736997" cy="338554"/>
-          </a:xfrm>
-          <a:prstGeom prst="rect">
-            <a:avLst/>
-          </a:prstGeom>
-          <a:noFill/>
-        </p:spPr>
-        <p:txBody>
-          <a:bodyPr wrap="none" rtlCol="0">
-            <a:spAutoFit/>
-          </a:bodyPr>
-          <a:lstStyle/>
-          <a:p>
-            <a:r>
-              <a:rPr lang="en-US" altLang="ko-KR" sz="1600" dirty="0">
-                <a:solidFill>
-                  <a:srgbClr val="00B0F0"/>
-                </a:solidFill>
-              </a:rPr>
-              <a:t>Part 0</a:t>
-            </a:r>
-            <a:endParaRPr lang="ko-KR" altLang="en-US" sz="1600" dirty="0">
-              <a:solidFill>
-                <a:srgbClr val="00B0F0"/>
-              </a:solidFill>
-            </a:endParaRPr>
-          </a:p>
-        </p:txBody>
-      </p:sp>
-      <p:sp>
-        <p:nvSpPr>
-          <p:cNvPr id="7" name="TextBox 6">
-            <a:extLst>
-              <a:ext uri="{FF2B5EF4-FFF2-40B4-BE49-F238E27FC236}">
-                <a16:creationId xmlns:a16="http://schemas.microsoft.com/office/drawing/2014/main" id="{EF27261A-6CFF-8578-BE65-8031814C579D}"/>
-              </a:ext>
-            </a:extLst>
-          </p:cNvPr>
-          <p:cNvSpPr txBox="1"/>
-          <p:nvPr/>
-        </p:nvSpPr>
-        <p:spPr>
-          <a:xfrm>
-            <a:off x="1163052" y="272716"/>
-            <a:ext cx="3475631" cy="523220"/>
-          </a:xfrm>
-          <a:prstGeom prst="rect">
-            <a:avLst/>
-          </a:prstGeom>
-          <a:noFill/>
-        </p:spPr>
-        <p:txBody>
-          <a:bodyPr wrap="none" rtlCol="0">
-            <a:spAutoFit/>
-          </a:bodyPr>
-          <a:lstStyle/>
-          <a:p>
-            <a:r>
-              <a:rPr lang="en-US" altLang="ko-KR" sz="2800" b="1" dirty="0">
-                <a:solidFill>
-                  <a:srgbClr val="00B0F0"/>
-                </a:solidFill>
-              </a:rPr>
-              <a:t>Loss Landscape</a:t>
-            </a:r>
-            <a:r>
-              <a:rPr lang="ko-KR" altLang="en-US" sz="2800" b="1" dirty="0">
-                <a:solidFill>
-                  <a:srgbClr val="00B0F0"/>
-                </a:solidFill>
-              </a:rPr>
-              <a:t> 란</a:t>
-            </a:r>
-            <a:r>
-              <a:rPr lang="en-US" altLang="ko-KR" sz="2800" b="1" dirty="0">
-                <a:solidFill>
-                  <a:srgbClr val="00B0F0"/>
-                </a:solidFill>
-              </a:rPr>
-              <a:t>?</a:t>
-            </a:r>
-            <a:endParaRPr lang="ko-KR" altLang="en-US" sz="2800" b="1" dirty="0">
-              <a:solidFill>
-                <a:srgbClr val="00B0F0"/>
-              </a:solidFill>
-            </a:endParaRPr>
-          </a:p>
-        </p:txBody>
-      </p:sp>
-      <p:cxnSp>
-        <p:nvCxnSpPr>
-          <p:cNvPr id="9" name="직선 연결선 8">
-            <a:extLst>
-              <a:ext uri="{FF2B5EF4-FFF2-40B4-BE49-F238E27FC236}">
-                <a16:creationId xmlns:a16="http://schemas.microsoft.com/office/drawing/2014/main" id="{7362F429-4402-7278-1A42-AF69008E5801}"/>
-              </a:ext>
-            </a:extLst>
-          </p:cNvPr>
-          <p:cNvCxnSpPr/>
-          <p:nvPr/>
-        </p:nvCxnSpPr>
-        <p:spPr>
-          <a:xfrm>
-            <a:off x="144378" y="160422"/>
-            <a:ext cx="12060000" cy="0"/>
-          </a:xfrm>
-          <a:prstGeom prst="line">
-            <a:avLst/>
-          </a:prstGeom>
-          <a:ln w="57150"/>
-        </p:spPr>
-        <p:style>
-          <a:lnRef idx="1">
-            <a:schemeClr val="accent4"/>
-          </a:lnRef>
-          <a:fillRef idx="0">
-            <a:schemeClr val="accent4"/>
-          </a:fillRef>
-          <a:effectRef idx="0">
-            <a:schemeClr val="accent4"/>
-          </a:effectRef>
-          <a:fontRef idx="minor">
-            <a:schemeClr val="tx1"/>
-          </a:fontRef>
-        </p:style>
-      </p:cxnSp>
-      <p:cxnSp>
-        <p:nvCxnSpPr>
-          <p:cNvPr id="11" name="직선 연결선 10">
-            <a:extLst>
-              <a:ext uri="{FF2B5EF4-FFF2-40B4-BE49-F238E27FC236}">
-                <a16:creationId xmlns:a16="http://schemas.microsoft.com/office/drawing/2014/main" id="{E37EDF31-1AE4-A2D9-39CE-9DF9B537EBD8}"/>
-              </a:ext>
-            </a:extLst>
-          </p:cNvPr>
-          <p:cNvCxnSpPr/>
-          <p:nvPr/>
-        </p:nvCxnSpPr>
-        <p:spPr>
-          <a:xfrm>
-            <a:off x="64064" y="6697578"/>
-            <a:ext cx="12060000" cy="0"/>
-          </a:xfrm>
-          <a:prstGeom prst="line">
-            <a:avLst/>
-          </a:prstGeom>
-          <a:ln/>
-        </p:spPr>
-        <p:style>
-          <a:lnRef idx="1">
-            <a:schemeClr val="accent4"/>
-          </a:lnRef>
-          <a:fillRef idx="0">
-            <a:schemeClr val="accent4"/>
-          </a:fillRef>
-          <a:effectRef idx="0">
-            <a:schemeClr val="accent4"/>
-          </a:effectRef>
-          <a:fontRef idx="minor">
-            <a:schemeClr val="tx1"/>
-          </a:fontRef>
-        </p:style>
-      </p:cxnSp>
-      <p:sp>
-        <p:nvSpPr>
-          <p:cNvPr id="4" name="TextBox 3">
-            <a:extLst>
-              <a:ext uri="{FF2B5EF4-FFF2-40B4-BE49-F238E27FC236}">
-                <a16:creationId xmlns:a16="http://schemas.microsoft.com/office/drawing/2014/main" id="{2A0409A7-7D44-7B54-E176-3DDD237EC18A}"/>
-              </a:ext>
-            </a:extLst>
-          </p:cNvPr>
-          <p:cNvSpPr txBox="1"/>
-          <p:nvPr/>
-        </p:nvSpPr>
-        <p:spPr>
-          <a:xfrm>
-            <a:off x="1682662" y="908229"/>
-            <a:ext cx="8326548" cy="2769989"/>
-          </a:xfrm>
-          <a:prstGeom prst="rect">
-            <a:avLst/>
-          </a:prstGeom>
-          <a:noFill/>
-        </p:spPr>
-        <p:txBody>
-          <a:bodyPr wrap="square" rtlCol="0">
-            <a:spAutoFit/>
-          </a:bodyPr>
-          <a:lstStyle/>
-          <a:p>
-            <a:r>
-              <a:rPr lang="en-US" altLang="ko-KR" sz="2400" b="1" dirty="0"/>
-              <a:t>Loss Landscape</a:t>
-            </a:r>
-          </a:p>
-          <a:p>
-            <a:endParaRPr lang="en-US" altLang="ko-KR" sz="2400" b="1" dirty="0"/>
-          </a:p>
-          <a:p>
-            <a:pPr marL="285750" indent="-285750">
-              <a:buFont typeface="Arial" panose="020B0604020202020204" pitchFamily="34" charset="0"/>
-              <a:buChar char="•"/>
-            </a:pPr>
-            <a:r>
-              <a:rPr lang="en-US" altLang="ko-KR" dirty="0" err="1"/>
-              <a:t>BN+ReLU</a:t>
-            </a:r>
-            <a:r>
-              <a:rPr lang="en-US" altLang="ko-KR" dirty="0"/>
-              <a:t> </a:t>
-            </a:r>
-            <a:r>
-              <a:rPr lang="ko-KR" altLang="en-US" dirty="0"/>
-              <a:t>이미 존재하여 </a:t>
-            </a:r>
-            <a:r>
-              <a:rPr lang="en-US" altLang="ko-KR" dirty="0"/>
-              <a:t>vanishing gradient </a:t>
-            </a:r>
-            <a:r>
-              <a:rPr lang="ko-KR" altLang="en-US" dirty="0"/>
-              <a:t>해결 </a:t>
-            </a:r>
-            <a:r>
-              <a:rPr lang="ko-KR" altLang="en-US" dirty="0" err="1"/>
-              <a:t>가능했을텐데</a:t>
-            </a:r>
-            <a:r>
-              <a:rPr lang="en-US" altLang="ko-KR" dirty="0"/>
-              <a:t>..</a:t>
-            </a:r>
-            <a:br>
-              <a:rPr lang="en-US" altLang="ko-KR" dirty="0"/>
-            </a:br>
-            <a:r>
-              <a:rPr lang="ko-KR" altLang="en-US" dirty="0"/>
-              <a:t>그래도 너무 깊으면 </a:t>
-            </a:r>
-            <a:r>
-              <a:rPr lang="en-US" altLang="ko-KR" dirty="0"/>
-              <a:t>training, test error</a:t>
-            </a:r>
-            <a:r>
-              <a:rPr lang="ko-KR" altLang="en-US" dirty="0"/>
-              <a:t>가 같이 커지더라</a:t>
-            </a:r>
-            <a:br>
-              <a:rPr lang="en-US" altLang="ko-KR" dirty="0"/>
-            </a:br>
-            <a:r>
-              <a:rPr lang="en-US" altLang="ko-KR" dirty="0"/>
-              <a:t>-&gt; overfitting</a:t>
-            </a:r>
-            <a:r>
-              <a:rPr lang="ko-KR" altLang="en-US" dirty="0"/>
-              <a:t>은 아님</a:t>
-            </a:r>
-            <a:r>
-              <a:rPr lang="en-US" altLang="ko-KR" dirty="0"/>
-              <a:t>!</a:t>
-            </a:r>
-          </a:p>
-          <a:p>
-            <a:pPr marL="285750" indent="-285750">
-              <a:buFont typeface="Arial" panose="020B0604020202020204" pitchFamily="34" charset="0"/>
-              <a:buChar char="•"/>
-            </a:pPr>
-            <a:r>
-              <a:rPr lang="ko-KR" altLang="en-US" dirty="0"/>
-              <a:t>이후에 </a:t>
-            </a:r>
-            <a:r>
-              <a:rPr lang="ko-KR" altLang="en-US" dirty="0" err="1"/>
-              <a:t>밝혀지길</a:t>
-            </a:r>
-            <a:r>
-              <a:rPr lang="ko-KR" altLang="en-US" dirty="0"/>
-              <a:t> 깊게 만들수록 </a:t>
-            </a:r>
-            <a:r>
-              <a:rPr lang="en-US" altLang="ko-KR" b="1" dirty="0"/>
-              <a:t>loss </a:t>
-            </a:r>
-            <a:r>
-              <a:rPr lang="ko-KR" altLang="en-US" b="1" dirty="0"/>
-              <a:t>모양이 꼬불꼬불해진다</a:t>
-            </a:r>
-            <a:r>
-              <a:rPr lang="en-US" altLang="ko-KR" b="1" dirty="0"/>
-              <a:t>!</a:t>
-            </a:r>
-          </a:p>
-          <a:p>
-            <a:pPr marL="285750" indent="-285750">
-              <a:buFont typeface="Arial" panose="020B0604020202020204" pitchFamily="34" charset="0"/>
-              <a:buChar char="•"/>
-            </a:pPr>
-            <a:r>
-              <a:rPr lang="en-US" altLang="ko-KR" dirty="0" err="1"/>
-              <a:t>ResNet</a:t>
-            </a:r>
-            <a:r>
-              <a:rPr lang="ko-KR" altLang="en-US" dirty="0"/>
-              <a:t>의 </a:t>
-            </a:r>
-            <a:r>
-              <a:rPr lang="en-US" altLang="ko-KR" b="1" dirty="0"/>
-              <a:t>skip-connection</a:t>
-            </a:r>
-            <a:r>
-              <a:rPr lang="ko-KR" altLang="en-US" dirty="0"/>
-              <a:t>이 대표적인 해결 방안 중 하나</a:t>
-            </a:r>
-            <a:endParaRPr lang="en-US" altLang="ko-KR" dirty="0"/>
-          </a:p>
-          <a:p>
-            <a:pPr marL="342900" indent="-342900">
-              <a:buAutoNum type="arabicPeriod"/>
-            </a:pPr>
-            <a:endParaRPr lang="en-US" altLang="ko-KR" dirty="0"/>
-          </a:p>
-          <a:p>
-            <a:pPr marL="342900" indent="-342900">
-              <a:buAutoNum type="arabicPeriod"/>
-            </a:pPr>
-            <a:endParaRPr lang="ko-KR" altLang="en-US" dirty="0"/>
-          </a:p>
-        </p:txBody>
-      </p:sp>
-      <p:pic>
-        <p:nvPicPr>
-          <p:cNvPr id="3" name="그림 2">
-            <a:extLst>
-              <a:ext uri="{FF2B5EF4-FFF2-40B4-BE49-F238E27FC236}">
-                <a16:creationId xmlns:a16="http://schemas.microsoft.com/office/drawing/2014/main" id="{719A2261-5B17-C620-D73D-5BEA38573DA2}"/>
-              </a:ext>
-            </a:extLst>
-          </p:cNvPr>
-          <p:cNvPicPr>
-            <a:picLocks noChangeAspect="1"/>
-          </p:cNvPicPr>
-          <p:nvPr/>
-        </p:nvPicPr>
-        <p:blipFill>
-          <a:blip r:embed="rId2"/>
-          <a:stretch>
-            <a:fillRect/>
-          </a:stretch>
-        </p:blipFill>
-        <p:spPr>
-          <a:xfrm>
-            <a:off x="512876" y="3401219"/>
-            <a:ext cx="4931554" cy="2825552"/>
-          </a:xfrm>
-          <a:prstGeom prst="rect">
-            <a:avLst/>
-          </a:prstGeom>
-        </p:spPr>
-      </p:pic>
-      <p:pic>
-        <p:nvPicPr>
-          <p:cNvPr id="8" name="그림 7">
-            <a:extLst>
-              <a:ext uri="{FF2B5EF4-FFF2-40B4-BE49-F238E27FC236}">
-                <a16:creationId xmlns:a16="http://schemas.microsoft.com/office/drawing/2014/main" id="{28707C3F-38E8-392F-1552-F4C1136DED00}"/>
-              </a:ext>
-            </a:extLst>
-          </p:cNvPr>
-          <p:cNvPicPr>
-            <a:picLocks noChangeAspect="1"/>
-          </p:cNvPicPr>
-          <p:nvPr/>
-        </p:nvPicPr>
-        <p:blipFill>
-          <a:blip r:embed="rId3"/>
-          <a:stretch>
-            <a:fillRect/>
-          </a:stretch>
-        </p:blipFill>
-        <p:spPr>
-          <a:xfrm>
-            <a:off x="6142446" y="3122559"/>
-            <a:ext cx="5036550" cy="2995108"/>
-          </a:xfrm>
-          <a:prstGeom prst="rect">
-            <a:avLst/>
-          </a:prstGeom>
-        </p:spPr>
-      </p:pic>
-    </p:spTree>
-    <p:extLst>
-      <p:ext uri="{BB962C8B-B14F-4D97-AF65-F5344CB8AC3E}">
-        <p14:creationId xmlns:p14="http://schemas.microsoft.com/office/powerpoint/2010/main" val="90988996"/>
       </p:ext>
     </p:extLst>
   </p:cSld>
@@ -8803,6 +8828,447 @@
     <p:extLst>
       <p:ext uri="{BB962C8B-B14F-4D97-AF65-F5344CB8AC3E}">
         <p14:creationId xmlns:p14="http://schemas.microsoft.com/office/powerpoint/2010/main" val="3800794757"/>
+      </p:ext>
+    </p:extLst>
+  </p:cSld>
+  <p:clrMapOvr>
+    <a:masterClrMapping/>
+  </p:clrMapOvr>
+</p:sld>
+</file>
+
+<file path=ppt/slides/slide20.xml><?xml version="1.0" encoding="utf-8"?>
+<p:sld xmlns:a="http://schemas.openxmlformats.org/drawingml/2006/main" xmlns:r="http://schemas.openxmlformats.org/officeDocument/2006/relationships" xmlns:p="http://schemas.openxmlformats.org/presentationml/2006/main">
+  <p:cSld>
+    <p:spTree>
+      <p:nvGrpSpPr>
+        <p:cNvPr id="1" name="">
+          <a:extLst>
+            <a:ext uri="{FF2B5EF4-FFF2-40B4-BE49-F238E27FC236}">
+              <a16:creationId xmlns:a16="http://schemas.microsoft.com/office/drawing/2014/main" id="{EBD4D760-7E0D-577F-BD68-2610F64921AD}"/>
+            </a:ext>
+          </a:extLst>
+        </p:cNvPr>
+        <p:cNvGrpSpPr/>
+        <p:nvPr/>
+      </p:nvGrpSpPr>
+      <p:grpSpPr>
+        <a:xfrm>
+          <a:off x="0" y="0"/>
+          <a:ext cx="0" cy="0"/>
+          <a:chOff x="0" y="0"/>
+          <a:chExt cx="0" cy="0"/>
+        </a:xfrm>
+      </p:grpSpPr>
+      <p:sp>
+        <p:nvSpPr>
+          <p:cNvPr id="6" name="TextBox 5">
+            <a:extLst>
+              <a:ext uri="{FF2B5EF4-FFF2-40B4-BE49-F238E27FC236}">
+                <a16:creationId xmlns:a16="http://schemas.microsoft.com/office/drawing/2014/main" id="{7449639C-48BA-413F-0829-843509B3ED50}"/>
+              </a:ext>
+            </a:extLst>
+          </p:cNvPr>
+          <p:cNvSpPr txBox="1"/>
+          <p:nvPr/>
+        </p:nvSpPr>
+        <p:spPr>
+          <a:xfrm>
+            <a:off x="144378" y="272716"/>
+            <a:ext cx="736997" cy="338554"/>
+          </a:xfrm>
+          <a:prstGeom prst="rect">
+            <a:avLst/>
+          </a:prstGeom>
+          <a:noFill/>
+        </p:spPr>
+        <p:txBody>
+          <a:bodyPr wrap="none" rtlCol="0">
+            <a:spAutoFit/>
+          </a:bodyPr>
+          <a:lstStyle/>
+          <a:p>
+            <a:r>
+              <a:rPr lang="en-US" altLang="ko-KR" sz="1600" dirty="0">
+                <a:solidFill>
+                  <a:srgbClr val="00B0F0"/>
+                </a:solidFill>
+              </a:rPr>
+              <a:t>Part 0</a:t>
+            </a:r>
+            <a:endParaRPr lang="ko-KR" altLang="en-US" sz="1600" dirty="0">
+              <a:solidFill>
+                <a:srgbClr val="00B0F0"/>
+              </a:solidFill>
+            </a:endParaRPr>
+          </a:p>
+        </p:txBody>
+      </p:sp>
+      <p:sp>
+        <p:nvSpPr>
+          <p:cNvPr id="7" name="TextBox 6">
+            <a:extLst>
+              <a:ext uri="{FF2B5EF4-FFF2-40B4-BE49-F238E27FC236}">
+                <a16:creationId xmlns:a16="http://schemas.microsoft.com/office/drawing/2014/main" id="{EF27261A-6CFF-8578-BE65-8031814C579D}"/>
+              </a:ext>
+            </a:extLst>
+          </p:cNvPr>
+          <p:cNvSpPr txBox="1"/>
+          <p:nvPr/>
+        </p:nvSpPr>
+        <p:spPr>
+          <a:xfrm>
+            <a:off x="1163052" y="272716"/>
+            <a:ext cx="3475631" cy="523220"/>
+          </a:xfrm>
+          <a:prstGeom prst="rect">
+            <a:avLst/>
+          </a:prstGeom>
+          <a:noFill/>
+        </p:spPr>
+        <p:txBody>
+          <a:bodyPr wrap="none" rtlCol="0">
+            <a:spAutoFit/>
+          </a:bodyPr>
+          <a:lstStyle/>
+          <a:p>
+            <a:r>
+              <a:rPr lang="en-US" altLang="ko-KR" sz="2800" b="1" dirty="0">
+                <a:solidFill>
+                  <a:srgbClr val="00B0F0"/>
+                </a:solidFill>
+              </a:rPr>
+              <a:t>Loss Landscape</a:t>
+            </a:r>
+            <a:r>
+              <a:rPr lang="ko-KR" altLang="en-US" sz="2800" b="1" dirty="0">
+                <a:solidFill>
+                  <a:srgbClr val="00B0F0"/>
+                </a:solidFill>
+              </a:rPr>
+              <a:t> 란</a:t>
+            </a:r>
+            <a:r>
+              <a:rPr lang="en-US" altLang="ko-KR" sz="2800" b="1" dirty="0">
+                <a:solidFill>
+                  <a:srgbClr val="00B0F0"/>
+                </a:solidFill>
+              </a:rPr>
+              <a:t>?</a:t>
+            </a:r>
+            <a:endParaRPr lang="ko-KR" altLang="en-US" sz="2800" b="1" dirty="0">
+              <a:solidFill>
+                <a:srgbClr val="00B0F0"/>
+              </a:solidFill>
+            </a:endParaRPr>
+          </a:p>
+        </p:txBody>
+      </p:sp>
+      <p:cxnSp>
+        <p:nvCxnSpPr>
+          <p:cNvPr id="9" name="직선 연결선 8">
+            <a:extLst>
+              <a:ext uri="{FF2B5EF4-FFF2-40B4-BE49-F238E27FC236}">
+                <a16:creationId xmlns:a16="http://schemas.microsoft.com/office/drawing/2014/main" id="{7362F429-4402-7278-1A42-AF69008E5801}"/>
+              </a:ext>
+            </a:extLst>
+          </p:cNvPr>
+          <p:cNvCxnSpPr/>
+          <p:nvPr/>
+        </p:nvCxnSpPr>
+        <p:spPr>
+          <a:xfrm>
+            <a:off x="144378" y="160422"/>
+            <a:ext cx="12060000" cy="0"/>
+          </a:xfrm>
+          <a:prstGeom prst="line">
+            <a:avLst/>
+          </a:prstGeom>
+          <a:ln w="57150"/>
+        </p:spPr>
+        <p:style>
+          <a:lnRef idx="1">
+            <a:schemeClr val="accent4"/>
+          </a:lnRef>
+          <a:fillRef idx="0">
+            <a:schemeClr val="accent4"/>
+          </a:fillRef>
+          <a:effectRef idx="0">
+            <a:schemeClr val="accent4"/>
+          </a:effectRef>
+          <a:fontRef idx="minor">
+            <a:schemeClr val="tx1"/>
+          </a:fontRef>
+        </p:style>
+      </p:cxnSp>
+      <p:cxnSp>
+        <p:nvCxnSpPr>
+          <p:cNvPr id="11" name="직선 연결선 10">
+            <a:extLst>
+              <a:ext uri="{FF2B5EF4-FFF2-40B4-BE49-F238E27FC236}">
+                <a16:creationId xmlns:a16="http://schemas.microsoft.com/office/drawing/2014/main" id="{E37EDF31-1AE4-A2D9-39CE-9DF9B537EBD8}"/>
+              </a:ext>
+            </a:extLst>
+          </p:cNvPr>
+          <p:cNvCxnSpPr/>
+          <p:nvPr/>
+        </p:nvCxnSpPr>
+        <p:spPr>
+          <a:xfrm>
+            <a:off x="64064" y="6697578"/>
+            <a:ext cx="12060000" cy="0"/>
+          </a:xfrm>
+          <a:prstGeom prst="line">
+            <a:avLst/>
+          </a:prstGeom>
+          <a:ln/>
+        </p:spPr>
+        <p:style>
+          <a:lnRef idx="1">
+            <a:schemeClr val="accent4"/>
+          </a:lnRef>
+          <a:fillRef idx="0">
+            <a:schemeClr val="accent4"/>
+          </a:fillRef>
+          <a:effectRef idx="0">
+            <a:schemeClr val="accent4"/>
+          </a:effectRef>
+          <a:fontRef idx="minor">
+            <a:schemeClr val="tx1"/>
+          </a:fontRef>
+        </p:style>
+      </p:cxnSp>
+      <p:sp>
+        <p:nvSpPr>
+          <p:cNvPr id="4" name="TextBox 3">
+            <a:extLst>
+              <a:ext uri="{FF2B5EF4-FFF2-40B4-BE49-F238E27FC236}">
+                <a16:creationId xmlns:a16="http://schemas.microsoft.com/office/drawing/2014/main" id="{2A0409A7-7D44-7B54-E176-3DDD237EC18A}"/>
+              </a:ext>
+            </a:extLst>
+          </p:cNvPr>
+          <p:cNvSpPr txBox="1"/>
+          <p:nvPr/>
+        </p:nvSpPr>
+        <p:spPr>
+          <a:xfrm>
+            <a:off x="1682662" y="908229"/>
+            <a:ext cx="8326548" cy="2769989"/>
+          </a:xfrm>
+          <a:prstGeom prst="rect">
+            <a:avLst/>
+          </a:prstGeom>
+          <a:noFill/>
+        </p:spPr>
+        <p:txBody>
+          <a:bodyPr wrap="square" rtlCol="0">
+            <a:spAutoFit/>
+          </a:bodyPr>
+          <a:lstStyle/>
+          <a:p>
+            <a:r>
+              <a:rPr lang="en-US" altLang="ko-KR" sz="2400" b="1" dirty="0"/>
+              <a:t>Loss Landscape</a:t>
+            </a:r>
+          </a:p>
+          <a:p>
+            <a:endParaRPr lang="en-US" altLang="ko-KR" sz="2400" b="1" dirty="0"/>
+          </a:p>
+          <a:p>
+            <a:pPr marL="285750" indent="-285750">
+              <a:buFont typeface="Arial" panose="020B0604020202020204" pitchFamily="34" charset="0"/>
+              <a:buChar char="•"/>
+            </a:pPr>
+            <a:r>
+              <a:rPr lang="en-US" altLang="ko-KR" dirty="0" err="1"/>
+              <a:t>BN+ReLU</a:t>
+            </a:r>
+            <a:r>
+              <a:rPr lang="en-US" altLang="ko-KR" dirty="0"/>
+              <a:t> </a:t>
+            </a:r>
+            <a:r>
+              <a:rPr lang="ko-KR" altLang="en-US" dirty="0"/>
+              <a:t>이미 존재하여 </a:t>
+            </a:r>
+            <a:r>
+              <a:rPr lang="en-US" altLang="ko-KR" dirty="0"/>
+              <a:t>vanishing gradient </a:t>
+            </a:r>
+            <a:r>
+              <a:rPr lang="ko-KR" altLang="en-US" dirty="0"/>
+              <a:t>해결 </a:t>
+            </a:r>
+            <a:r>
+              <a:rPr lang="ko-KR" altLang="en-US" dirty="0" err="1"/>
+              <a:t>가능했을텐데</a:t>
+            </a:r>
+            <a:r>
+              <a:rPr lang="en-US" altLang="ko-KR" dirty="0"/>
+              <a:t>..</a:t>
+            </a:r>
+            <a:br>
+              <a:rPr lang="en-US" altLang="ko-KR" dirty="0"/>
+            </a:br>
+            <a:r>
+              <a:rPr lang="ko-KR" altLang="en-US" dirty="0"/>
+              <a:t>그래도 너무 깊으면 </a:t>
+            </a:r>
+            <a:r>
+              <a:rPr lang="en-US" altLang="ko-KR" dirty="0"/>
+              <a:t>training, test error</a:t>
+            </a:r>
+            <a:r>
+              <a:rPr lang="ko-KR" altLang="en-US" dirty="0"/>
+              <a:t>가 같이 커지더라</a:t>
+            </a:r>
+            <a:br>
+              <a:rPr lang="en-US" altLang="ko-KR" dirty="0"/>
+            </a:br>
+            <a:r>
+              <a:rPr lang="en-US" altLang="ko-KR" dirty="0"/>
+              <a:t>-&gt; overfitting</a:t>
+            </a:r>
+            <a:r>
+              <a:rPr lang="ko-KR" altLang="en-US" dirty="0"/>
+              <a:t>은 아님</a:t>
+            </a:r>
+            <a:r>
+              <a:rPr lang="en-US" altLang="ko-KR" dirty="0"/>
+              <a:t>!</a:t>
+            </a:r>
+          </a:p>
+          <a:p>
+            <a:pPr marL="285750" indent="-285750">
+              <a:buFont typeface="Arial" panose="020B0604020202020204" pitchFamily="34" charset="0"/>
+              <a:buChar char="•"/>
+            </a:pPr>
+            <a:r>
+              <a:rPr lang="ko-KR" altLang="en-US" dirty="0"/>
+              <a:t>이후에 </a:t>
+            </a:r>
+            <a:r>
+              <a:rPr lang="ko-KR" altLang="en-US" dirty="0" err="1"/>
+              <a:t>밝혀지길</a:t>
+            </a:r>
+            <a:r>
+              <a:rPr lang="ko-KR" altLang="en-US" dirty="0"/>
+              <a:t> 깊게 만들수록 </a:t>
+            </a:r>
+            <a:r>
+              <a:rPr lang="en-US" altLang="ko-KR" b="1" dirty="0"/>
+              <a:t>loss </a:t>
+            </a:r>
+            <a:r>
+              <a:rPr lang="ko-KR" altLang="en-US" b="1" dirty="0"/>
+              <a:t>모양이 꼬불꼬불해진다</a:t>
+            </a:r>
+            <a:r>
+              <a:rPr lang="en-US" altLang="ko-KR" b="1" dirty="0"/>
+              <a:t>!</a:t>
+            </a:r>
+          </a:p>
+          <a:p>
+            <a:pPr marL="285750" indent="-285750">
+              <a:buFont typeface="Arial" panose="020B0604020202020204" pitchFamily="34" charset="0"/>
+              <a:buChar char="•"/>
+            </a:pPr>
+            <a:r>
+              <a:rPr lang="en-US" altLang="ko-KR" dirty="0" err="1"/>
+              <a:t>ResNet</a:t>
+            </a:r>
+            <a:r>
+              <a:rPr lang="ko-KR" altLang="en-US" dirty="0"/>
+              <a:t>의 </a:t>
+            </a:r>
+            <a:r>
+              <a:rPr lang="en-US" altLang="ko-KR" b="1" dirty="0"/>
+              <a:t>skip-connection</a:t>
+            </a:r>
+            <a:r>
+              <a:rPr lang="ko-KR" altLang="en-US" dirty="0"/>
+              <a:t>이 대표적인 해결 방안 중 하나</a:t>
+            </a:r>
+            <a:endParaRPr lang="en-US" altLang="ko-KR" dirty="0"/>
+          </a:p>
+          <a:p>
+            <a:pPr marL="342900" indent="-342900">
+              <a:buAutoNum type="arabicPeriod"/>
+            </a:pPr>
+            <a:endParaRPr lang="en-US" altLang="ko-KR" dirty="0"/>
+          </a:p>
+          <a:p>
+            <a:pPr marL="342900" indent="-342900">
+              <a:buAutoNum type="arabicPeriod"/>
+            </a:pPr>
+            <a:endParaRPr lang="ko-KR" altLang="en-US" dirty="0"/>
+          </a:p>
+        </p:txBody>
+      </p:sp>
+      <p:pic>
+        <p:nvPicPr>
+          <p:cNvPr id="3" name="그림 2">
+            <a:extLst>
+              <a:ext uri="{FF2B5EF4-FFF2-40B4-BE49-F238E27FC236}">
+                <a16:creationId xmlns:a16="http://schemas.microsoft.com/office/drawing/2014/main" id="{719A2261-5B17-C620-D73D-5BEA38573DA2}"/>
+              </a:ext>
+            </a:extLst>
+          </p:cNvPr>
+          <p:cNvPicPr>
+            <a:picLocks noChangeAspect="1"/>
+          </p:cNvPicPr>
+          <p:nvPr/>
+        </p:nvPicPr>
+        <p:blipFill>
+          <a:blip r:embed="rId2"/>
+          <a:stretch>
+            <a:fillRect/>
+          </a:stretch>
+        </p:blipFill>
+        <p:spPr>
+          <a:xfrm>
+            <a:off x="512876" y="3401219"/>
+            <a:ext cx="4931554" cy="2825552"/>
+          </a:xfrm>
+          <a:prstGeom prst="rect">
+            <a:avLst/>
+          </a:prstGeom>
+        </p:spPr>
+      </p:pic>
+      <p:pic>
+        <p:nvPicPr>
+          <p:cNvPr id="8" name="그림 7">
+            <a:extLst>
+              <a:ext uri="{FF2B5EF4-FFF2-40B4-BE49-F238E27FC236}">
+                <a16:creationId xmlns:a16="http://schemas.microsoft.com/office/drawing/2014/main" id="{28707C3F-38E8-392F-1552-F4C1136DED00}"/>
+              </a:ext>
+            </a:extLst>
+          </p:cNvPr>
+          <p:cNvPicPr>
+            <a:picLocks noChangeAspect="1"/>
+          </p:cNvPicPr>
+          <p:nvPr/>
+        </p:nvPicPr>
+        <p:blipFill>
+          <a:blip r:embed="rId3"/>
+          <a:stretch>
+            <a:fillRect/>
+          </a:stretch>
+        </p:blipFill>
+        <p:spPr>
+          <a:xfrm>
+            <a:off x="6142446" y="3122559"/>
+            <a:ext cx="5036550" cy="2995108"/>
+          </a:xfrm>
+          <a:prstGeom prst="rect">
+            <a:avLst/>
+          </a:prstGeom>
+        </p:spPr>
+      </p:pic>
+    </p:spTree>
+    <p:extLst>
+      <p:ext uri="{BB962C8B-B14F-4D97-AF65-F5344CB8AC3E}">
+        <p14:creationId xmlns:p14="http://schemas.microsoft.com/office/powerpoint/2010/main" val="90988996"/>
       </p:ext>
     </p:extLst>
   </p:cSld>
